--- a/soutenance-b3-data-ia.pptx
+++ b/soutenance-b3-data-ia.pptx
@@ -4,6 +4,9 @@
   <p:sldMasterIdLst>
     <p:sldMasterId id="2147483648" r:id="rId1"/>
   </p:sldMasterIdLst>
+  <p:notesMasterIdLst>
+    <p:notesMasterId r:id="rId11"/>
+  </p:notesMasterIdLst>
   <p:sldIdLst>
     <p:sldId id="256" r:id="rId2"/>
     <p:sldId id="257" r:id="rId3"/>
@@ -129,6 +132,1220 @@
     </p:ext>
   </p:extLst>
 </p:presentation>
+</file>
+
+<file path=ppt/notesMasters/notesMaster1.xml><?xml version="1.0" encoding="utf-8"?>
+<p:notesMaster xmlns:a="http://schemas.openxmlformats.org/drawingml/2006/main" xmlns:r="http://schemas.openxmlformats.org/officeDocument/2006/relationships" xmlns:p="http://schemas.openxmlformats.org/presentationml/2006/main">
+  <p:cSld>
+    <p:bg>
+      <p:bgRef idx="1001">
+        <a:schemeClr val="bg1"/>
+      </p:bgRef>
+    </p:bg>
+    <p:spTree>
+      <p:nvGrpSpPr>
+        <p:cNvPr id="1" name=""/>
+        <p:cNvGrpSpPr/>
+        <p:nvPr/>
+      </p:nvGrpSpPr>
+      <p:grpSpPr>
+        <a:xfrm>
+          <a:off x="0" y="0"/>
+          <a:ext cx="0" cy="0"/>
+          <a:chOff x="0" y="0"/>
+          <a:chExt cx="0" cy="0"/>
+        </a:xfrm>
+      </p:grpSpPr>
+    </p:spTree>
+    <p:extLst>
+      <p:ext uri="{BB962C8B-B14F-4D97-AF65-F5344CB8AC3E}">
+        <p14:creationId xmlns:p14="http://schemas.microsoft.com/office/powerpoint/2010/main" val="4213537952"/>
+      </p:ext>
+    </p:extLst>
+  </p:cSld>
+  <p:clrMap bg1="lt1" tx1="dk1" bg2="lt2" tx2="dk2" accent1="accent1" accent2="accent2" accent3="accent3" accent4="accent4" accent5="accent5" accent6="accent6" hlink="hlink" folHlink="folHlink"/>
+  <p:notesStyle>
+    <a:lvl1pPr marL="0" algn="l" defTabSz="914400" rtl="0" eaLnBrk="1" latinLnBrk="0" hangingPunct="1">
+      <a:defRPr sz="1200" kern="1200">
+        <a:solidFill>
+          <a:schemeClr val="tx1"/>
+        </a:solidFill>
+        <a:latin typeface="+mn-lt"/>
+        <a:ea typeface="+mn-ea"/>
+        <a:cs typeface="+mn-cs"/>
+      </a:defRPr>
+    </a:lvl1pPr>
+    <a:lvl2pPr marL="457200" algn="l" defTabSz="914400" rtl="0" eaLnBrk="1" latinLnBrk="0" hangingPunct="1">
+      <a:defRPr sz="1200" kern="1200">
+        <a:solidFill>
+          <a:schemeClr val="tx1"/>
+        </a:solidFill>
+        <a:latin typeface="+mn-lt"/>
+        <a:ea typeface="+mn-ea"/>
+        <a:cs typeface="+mn-cs"/>
+      </a:defRPr>
+    </a:lvl2pPr>
+    <a:lvl3pPr marL="914400" algn="l" defTabSz="914400" rtl="0" eaLnBrk="1" latinLnBrk="0" hangingPunct="1">
+      <a:defRPr sz="1200" kern="1200">
+        <a:solidFill>
+          <a:schemeClr val="tx1"/>
+        </a:solidFill>
+        <a:latin typeface="+mn-lt"/>
+        <a:ea typeface="+mn-ea"/>
+        <a:cs typeface="+mn-cs"/>
+      </a:defRPr>
+    </a:lvl3pPr>
+    <a:lvl4pPr marL="1371600" algn="l" defTabSz="914400" rtl="0" eaLnBrk="1" latinLnBrk="0" hangingPunct="1">
+      <a:defRPr sz="1200" kern="1200">
+        <a:solidFill>
+          <a:schemeClr val="tx1"/>
+        </a:solidFill>
+        <a:latin typeface="+mn-lt"/>
+        <a:ea typeface="+mn-ea"/>
+        <a:cs typeface="+mn-cs"/>
+      </a:defRPr>
+    </a:lvl4pPr>
+    <a:lvl5pPr marL="1828800" algn="l" defTabSz="914400" rtl="0" eaLnBrk="1" latinLnBrk="0" hangingPunct="1">
+      <a:defRPr sz="1200" kern="1200">
+        <a:solidFill>
+          <a:schemeClr val="tx1"/>
+        </a:solidFill>
+        <a:latin typeface="+mn-lt"/>
+        <a:ea typeface="+mn-ea"/>
+        <a:cs typeface="+mn-cs"/>
+      </a:defRPr>
+    </a:lvl5pPr>
+    <a:lvl6pPr marL="2286000" algn="l" defTabSz="914400" rtl="0" eaLnBrk="1" latinLnBrk="0" hangingPunct="1">
+      <a:defRPr sz="1200" kern="1200">
+        <a:solidFill>
+          <a:schemeClr val="tx1"/>
+        </a:solidFill>
+        <a:latin typeface="+mn-lt"/>
+        <a:ea typeface="+mn-ea"/>
+        <a:cs typeface="+mn-cs"/>
+      </a:defRPr>
+    </a:lvl6pPr>
+    <a:lvl7pPr marL="2743200" algn="l" defTabSz="914400" rtl="0" eaLnBrk="1" latinLnBrk="0" hangingPunct="1">
+      <a:defRPr sz="1200" kern="1200">
+        <a:solidFill>
+          <a:schemeClr val="tx1"/>
+        </a:solidFill>
+        <a:latin typeface="+mn-lt"/>
+        <a:ea typeface="+mn-ea"/>
+        <a:cs typeface="+mn-cs"/>
+      </a:defRPr>
+    </a:lvl7pPr>
+    <a:lvl8pPr marL="3200400" algn="l" defTabSz="914400" rtl="0" eaLnBrk="1" latinLnBrk="0" hangingPunct="1">
+      <a:defRPr sz="1200" kern="1200">
+        <a:solidFill>
+          <a:schemeClr val="tx1"/>
+        </a:solidFill>
+        <a:latin typeface="+mn-lt"/>
+        <a:ea typeface="+mn-ea"/>
+        <a:cs typeface="+mn-cs"/>
+      </a:defRPr>
+    </a:lvl8pPr>
+    <a:lvl9pPr marL="3657600" algn="l" defTabSz="914400" rtl="0" eaLnBrk="1" latinLnBrk="0" hangingPunct="1">
+      <a:defRPr sz="1200" kern="1200">
+        <a:solidFill>
+          <a:schemeClr val="tx1"/>
+        </a:solidFill>
+        <a:latin typeface="+mn-lt"/>
+        <a:ea typeface="+mn-ea"/>
+        <a:cs typeface="+mn-cs"/>
+      </a:defRPr>
+    </a:lvl9pPr>
+  </p:notesStyle>
+</p:notesMaster>
+</file>
+
+<file path=ppt/notesSlides/notesSlide1.xml><?xml version="1.0" encoding="utf-8"?>
+<p:notes xmlns:a="http://schemas.openxmlformats.org/drawingml/2006/main" xmlns:r="http://schemas.openxmlformats.org/officeDocument/2006/relationships" xmlns:p="http://schemas.openxmlformats.org/presentationml/2006/main">
+  <p:cSld>
+    <p:spTree>
+      <p:nvGrpSpPr>
+        <p:cNvPr id="1" name=""/>
+        <p:cNvGrpSpPr/>
+        <p:nvPr/>
+      </p:nvGrpSpPr>
+      <p:grpSpPr>
+        <a:xfrm>
+          <a:off x="0" y="0"/>
+          <a:ext cx="0" cy="0"/>
+          <a:chOff x="0" y="0"/>
+          <a:chExt cx="0" cy="0"/>
+        </a:xfrm>
+      </p:grpSpPr>
+      <p:sp>
+        <p:nvSpPr>
+          <p:cNvPr id="2" name="Slide Image Placeholder 1"/>
+          <p:cNvSpPr>
+            <a:spLocks noGrp="1" noRot="1" noChangeAspect="1"/>
+          </p:cNvSpPr>
+          <p:nvPr>
+            <p:ph type="sldImg" idx="2"/>
+          </p:nvPr>
+        </p:nvSpPr>
+        <p:spPr/>
+      </p:sp>
+      <p:sp>
+        <p:nvSpPr>
+          <p:cNvPr id="3" name="Notes Placeholder 2"/>
+          <p:cNvSpPr>
+            <a:spLocks noGrp="1"/>
+          </p:cNvSpPr>
+          <p:nvPr>
+            <p:ph type="body" sz="quarter" idx="3"/>
+          </p:nvPr>
+        </p:nvSpPr>
+        <p:spPr/>
+        <p:txBody>
+          <a:bodyPr/>
+          <a:lstStyle/>
+          <a:p>
+            <a:r>
+              <a:t>scikit-learn : bibliotheque Python pour le machine learning (regression, clustering, preprocessing...).</a:t>
+            </a:r>
+          </a:p>
+          <a:p>
+            <a:r>
+              <a:t>React + Vite : framework JavaScript pour l'interface utilisateur, Vite est l'outil de build rapide.</a:t>
+            </a:r>
+          </a:p>
+          <a:p>
+            <a:r>
+              <a:t>FastAPI : framework Python pour creer une API web qui expose le modele ML.</a:t>
+            </a:r>
+          </a:p>
+          <a:p>
+            <a:r>
+              <a:t>HF Spaces : Hugging Face Spaces = hebergement gratuit pour deployer des apps ML en ligne.</a:t>
+            </a:r>
+          </a:p>
+        </p:txBody>
+      </p:sp>
+      <p:sp>
+        <p:nvSpPr>
+          <p:cNvPr id="4" name="Slide Number Placeholder 3"/>
+          <p:cNvSpPr>
+            <a:spLocks noGrp="1"/>
+          </p:cNvSpPr>
+          <p:nvPr>
+            <p:ph type="sldNum" sz="quarter" idx="5"/>
+          </p:nvPr>
+        </p:nvSpPr>
+        <p:spPr/>
+      </p:sp>
+    </p:spTree>
+  </p:cSld>
+  <p:clrMapOvr>
+    <a:masterClrMapping/>
+  </p:clrMapOvr>
+</p:notes>
+</file>
+
+<file path=ppt/notesSlides/notesSlide2.xml><?xml version="1.0" encoding="utf-8"?>
+<p:notes xmlns:a="http://schemas.openxmlformats.org/drawingml/2006/main" xmlns:r="http://schemas.openxmlformats.org/officeDocument/2006/relationships" xmlns:p="http://schemas.openxmlformats.org/presentationml/2006/main">
+  <p:cSld>
+    <p:spTree>
+      <p:nvGrpSpPr>
+        <p:cNvPr id="1" name=""/>
+        <p:cNvGrpSpPr/>
+        <p:nvPr/>
+      </p:nvGrpSpPr>
+      <p:grpSpPr>
+        <a:xfrm>
+          <a:off x="0" y="0"/>
+          <a:ext cx="0" cy="0"/>
+          <a:chOff x="0" y="0"/>
+          <a:chExt cx="0" cy="0"/>
+        </a:xfrm>
+      </p:grpSpPr>
+      <p:sp>
+        <p:nvSpPr>
+          <p:cNvPr id="2" name="Slide Image Placeholder 1"/>
+          <p:cNvSpPr>
+            <a:spLocks noGrp="1" noRot="1" noChangeAspect="1"/>
+          </p:cNvSpPr>
+          <p:nvPr>
+            <p:ph type="sldImg" idx="2"/>
+          </p:nvPr>
+        </p:nvSpPr>
+        <p:spPr/>
+      </p:sp>
+      <p:sp>
+        <p:nvSpPr>
+          <p:cNvPr id="3" name="Notes Placeholder 2"/>
+          <p:cNvSpPr>
+            <a:spLocks noGrp="1"/>
+          </p:cNvSpPr>
+          <p:nvPr>
+            <p:ph type="body" sz="quarter" idx="3"/>
+          </p:nvPr>
+        </p:nvSpPr>
+        <p:spPr/>
+        <p:txBody>
+          <a:bodyPr/>
+          <a:lstStyle/>
+          <a:p>
+            <a:r>
+              <a:t>Pipeline data : la chaine de traitement des donnees brutes jusqu'au modele.</a:t>
+            </a:r>
+          </a:p>
+          <a:p>
+            <a:r>
+              <a:t>Demo live : on montre l'application reelle deployee, pas des screenshots.</a:t>
+            </a:r>
+          </a:p>
+          <a:p>
+            <a:r>
+              <a:t>Q&amp;A : le formateur pose des questions sur les choix techniques. Soyez directs et honnetes.</a:t>
+            </a:r>
+          </a:p>
+        </p:txBody>
+      </p:sp>
+      <p:sp>
+        <p:nvSpPr>
+          <p:cNvPr id="4" name="Slide Number Placeholder 3"/>
+          <p:cNvSpPr>
+            <a:spLocks noGrp="1"/>
+          </p:cNvSpPr>
+          <p:nvPr>
+            <p:ph type="sldNum" sz="quarter" idx="5"/>
+          </p:nvPr>
+        </p:nvSpPr>
+        <p:spPr/>
+      </p:sp>
+    </p:spTree>
+  </p:cSld>
+  <p:clrMapOvr>
+    <a:masterClrMapping/>
+  </p:clrMapOvr>
+</p:notes>
+</file>
+
+<file path=ppt/notesSlides/notesSlide3.xml><?xml version="1.0" encoding="utf-8"?>
+<p:notes xmlns:a="http://schemas.openxmlformats.org/drawingml/2006/main" xmlns:r="http://schemas.openxmlformats.org/officeDocument/2006/relationships" xmlns:p="http://schemas.openxmlformats.org/presentationml/2006/main">
+  <p:cSld>
+    <p:spTree>
+      <p:nvGrpSpPr>
+        <p:cNvPr id="1" name=""/>
+        <p:cNvGrpSpPr/>
+        <p:nvPr/>
+      </p:nvGrpSpPr>
+      <p:grpSpPr>
+        <a:xfrm>
+          <a:off x="0" y="0"/>
+          <a:ext cx="0" cy="0"/>
+          <a:chOff x="0" y="0"/>
+          <a:chExt cx="0" cy="0"/>
+        </a:xfrm>
+      </p:grpSpPr>
+      <p:sp>
+        <p:nvSpPr>
+          <p:cNvPr id="2" name="Slide Image Placeholder 1"/>
+          <p:cNvSpPr>
+            <a:spLocks noGrp="1" noRot="1" noChangeAspect="1"/>
+          </p:cNvSpPr>
+          <p:nvPr>
+            <p:ph type="sldImg" idx="2"/>
+          </p:nvPr>
+        </p:nvSpPr>
+        <p:spPr/>
+      </p:sp>
+      <p:sp>
+        <p:nvSpPr>
+          <p:cNvPr id="3" name="Notes Placeholder 2"/>
+          <p:cNvSpPr>
+            <a:spLocks noGrp="1"/>
+          </p:cNvSpPr>
+          <p:nvPr>
+            <p:ph type="body" sz="quarter" idx="3"/>
+          </p:nvPr>
+        </p:nvSpPr>
+        <p:spPr/>
+        <p:txBody>
+          <a:bodyPr/>
+          <a:lstStyle/>
+          <a:p>
+            <a:r>
+              <a:t>Dataset sklearn diabetes : jeu de donnees de reference en ML biomedical, issu de Efron et al. 2004.</a:t>
+            </a:r>
+          </a:p>
+          <a:p>
+            <a:endParaRPr/>
+          </a:p>
+          <a:p>
+            <a:r>
+              <a:t>Les 10 features (toutes normalises entre -0.2 et +0.2 par sklearn) :</a:t>
+            </a:r>
+          </a:p>
+          <a:p>
+            <a:r>
+              <a:t>  - age  : age du patient</a:t>
+            </a:r>
+          </a:p>
+          <a:p>
+            <a:r>
+              <a:t>  - sex  : sexe (encode numeriquement)</a:t>
+            </a:r>
+          </a:p>
+          <a:p>
+            <a:r>
+              <a:t>  - bmi  : Body Mass Index = poids(kg) / taille(m)^2. Indice de corpulence. Normal : 18.5-25.</a:t>
+            </a:r>
+          </a:p>
+          <a:p>
+            <a:r>
+              <a:t>  - bp   : blood pressure = pression arterielle moyenne</a:t>
+            </a:r>
+          </a:p>
+          <a:p>
+            <a:r>
+              <a:t>  - s1   : tc = total cholesterol (cholesterol total)</a:t>
+            </a:r>
+          </a:p>
+          <a:p>
+            <a:r>
+              <a:t>  - s2   : ldl = Low-Density Lipoprotein = 'mauvais cholesterol'</a:t>
+            </a:r>
+          </a:p>
+          <a:p>
+            <a:r>
+              <a:t>  - s3   : hdl = High-Density Lipoprotein = 'bon cholesterol'</a:t>
+            </a:r>
+          </a:p>
+          <a:p>
+            <a:r>
+              <a:t>  - s4   : rapport tc/hdl (ratio cholesterol)</a:t>
+            </a:r>
+          </a:p>
+          <a:p>
+            <a:r>
+              <a:t>  - s5   : ltg = log du taux de triglycerides</a:t>
+            </a:r>
+          </a:p>
+          <a:p>
+            <a:r>
+              <a:t>  - s6   : glu = glycemie (taux de sucre dans le sang)</a:t>
+            </a:r>
+          </a:p>
+          <a:p>
+            <a:endParaRPr/>
+          </a:p>
+          <a:p>
+            <a:r>
+              <a:t>Cible : mesure de progression du diabete 1 an apres le diagnostic (valeur entre 25 et 346).</a:t>
+            </a:r>
+          </a:p>
+          <a:p>
+            <a:r>
+              <a:t>Deja normalises : sklearn a deja centre et reduit les valeurs =&gt; pas besoin de re-normaliser.</a:t>
+            </a:r>
+          </a:p>
+        </p:txBody>
+      </p:sp>
+      <p:sp>
+        <p:nvSpPr>
+          <p:cNvPr id="4" name="Slide Number Placeholder 3"/>
+          <p:cNvSpPr>
+            <a:spLocks noGrp="1"/>
+          </p:cNvSpPr>
+          <p:nvPr>
+            <p:ph type="sldNum" sz="quarter" idx="5"/>
+          </p:nvPr>
+        </p:nvSpPr>
+        <p:spPr/>
+      </p:sp>
+    </p:spTree>
+  </p:cSld>
+  <p:clrMapOvr>
+    <a:masterClrMapping/>
+  </p:clrMapOvr>
+</p:notes>
+</file>
+
+<file path=ppt/notesSlides/notesSlide4.xml><?xml version="1.0" encoding="utf-8"?>
+<p:notes xmlns:a="http://schemas.openxmlformats.org/drawingml/2006/main" xmlns:r="http://schemas.openxmlformats.org/officeDocument/2006/relationships" xmlns:p="http://schemas.openxmlformats.org/presentationml/2006/main">
+  <p:cSld>
+    <p:spTree>
+      <p:nvGrpSpPr>
+        <p:cNvPr id="1" name=""/>
+        <p:cNvGrpSpPr/>
+        <p:nvPr/>
+      </p:nvGrpSpPr>
+      <p:grpSpPr>
+        <a:xfrm>
+          <a:off x="0" y="0"/>
+          <a:ext cx="0" cy="0"/>
+          <a:chOff x="0" y="0"/>
+          <a:chExt cx="0" cy="0"/>
+        </a:xfrm>
+      </p:grpSpPr>
+      <p:sp>
+        <p:nvSpPr>
+          <p:cNvPr id="2" name="Slide Image Placeholder 1"/>
+          <p:cNvSpPr>
+            <a:spLocks noGrp="1" noRot="1" noChangeAspect="1"/>
+          </p:cNvSpPr>
+          <p:nvPr>
+            <p:ph type="sldImg" idx="2"/>
+          </p:nvPr>
+        </p:nvSpPr>
+        <p:spPr/>
+      </p:sp>
+      <p:sp>
+        <p:nvSpPr>
+          <p:cNvPr id="3" name="Notes Placeholder 2"/>
+          <p:cNvSpPr>
+            <a:spLocks noGrp="1"/>
+          </p:cNvSpPr>
+          <p:nvPr>
+            <p:ph type="body" sz="quarter" idx="3"/>
+          </p:nvPr>
+        </p:nvSpPr>
+        <p:spPr/>
+        <p:txBody>
+          <a:bodyPr/>
+          <a:lstStyle/>
+          <a:p>
+            <a:r>
+              <a:t>SimpleImputer(strategy='median') : remplace les valeurs manquantes par la mediane de la colonne.</a:t>
+            </a:r>
+          </a:p>
+          <a:p>
+            <a:r>
+              <a:t>  Pourquoi median et pas mean ? Plus robuste aux valeurs extremes (outliers).</a:t>
+            </a:r>
+          </a:p>
+          <a:p>
+            <a:endParaRPr/>
+          </a:p>
+          <a:p>
+            <a:r>
+              <a:t>StandardScaler : centre (moyenne = 0) et reduit (ecart-type = 1) chaque feature.</a:t>
+            </a:r>
+          </a:p>
+          <a:p>
+            <a:r>
+              <a:t>  Pourquoi ? Les modeles lineaires regularises sont sensibles a l'echelle des variables.</a:t>
+            </a:r>
+          </a:p>
+          <a:p>
+            <a:endParaRPr/>
+          </a:p>
+          <a:p>
+            <a:r>
+              <a:t>ColumnTransformer : applique des transformations differentes selon les colonnes.</a:t>
+            </a:r>
+          </a:p>
+          <a:p>
+            <a:r>
+              <a:t>  Ici toutes numeriques donc un seul transformateur, mais la structure est extensible.</a:t>
+            </a:r>
+          </a:p>
+          <a:p>
+            <a:endParaRPr/>
+          </a:p>
+          <a:p>
+            <a:r>
+              <a:t>Pipeline sklearn : enchaine preprocessing + modele en un objet unique.</a:t>
+            </a:r>
+          </a:p>
+          <a:p>
+            <a:r>
+              <a:t>  Avantage : pas de data leakage, on peut appeler .fit() et .predict() directement.</a:t>
+            </a:r>
+          </a:p>
+          <a:p>
+            <a:endParaRPr/>
+          </a:p>
+          <a:p>
+            <a:r>
+              <a:t>random_state=42 : graine aleatoire fixee =&gt; meme split a chaque execution =&gt; reproductible.</a:t>
+            </a:r>
+          </a:p>
+          <a:p>
+            <a:endParaRPr/>
+          </a:p>
+          <a:p>
+            <a:r>
+              <a:t>Split 60/20/20 :</a:t>
+            </a:r>
+          </a:p>
+          <a:p>
+            <a:r>
+              <a:t>  - train (264) : le modele apprend dessus</a:t>
+            </a:r>
+          </a:p>
+          <a:p>
+            <a:r>
+              <a:t>  - val (89)    : on ajuste les hyperparametres</a:t>
+            </a:r>
+          </a:p>
+          <a:p>
+            <a:r>
+              <a:t>  - test (89)   : evaluation finale, touche une seule fois</a:t>
+            </a:r>
+          </a:p>
+        </p:txBody>
+      </p:sp>
+      <p:sp>
+        <p:nvSpPr>
+          <p:cNvPr id="4" name="Slide Number Placeholder 3"/>
+          <p:cNvSpPr>
+            <a:spLocks noGrp="1"/>
+          </p:cNvSpPr>
+          <p:nvPr>
+            <p:ph type="sldNum" sz="quarter" idx="5"/>
+          </p:nvPr>
+        </p:nvSpPr>
+        <p:spPr/>
+      </p:sp>
+    </p:spTree>
+  </p:cSld>
+  <p:clrMapOvr>
+    <a:masterClrMapping/>
+  </p:clrMapOvr>
+</p:notes>
+</file>
+
+<file path=ppt/notesSlides/notesSlide5.xml><?xml version="1.0" encoding="utf-8"?>
+<p:notes xmlns:a="http://schemas.openxmlformats.org/drawingml/2006/main" xmlns:r="http://schemas.openxmlformats.org/officeDocument/2006/relationships" xmlns:p="http://schemas.openxmlformats.org/presentationml/2006/main">
+  <p:cSld>
+    <p:spTree>
+      <p:nvGrpSpPr>
+        <p:cNvPr id="1" name=""/>
+        <p:cNvGrpSpPr/>
+        <p:nvPr/>
+      </p:nvGrpSpPr>
+      <p:grpSpPr>
+        <a:xfrm>
+          <a:off x="0" y="0"/>
+          <a:ext cx="0" cy="0"/>
+          <a:chOff x="0" y="0"/>
+          <a:chExt cx="0" cy="0"/>
+        </a:xfrm>
+      </p:grpSpPr>
+      <p:sp>
+        <p:nvSpPr>
+          <p:cNvPr id="2" name="Slide Image Placeholder 1"/>
+          <p:cNvSpPr>
+            <a:spLocks noGrp="1" noRot="1" noChangeAspect="1"/>
+          </p:cNvSpPr>
+          <p:nvPr>
+            <p:ph type="sldImg" idx="2"/>
+          </p:nvPr>
+        </p:nvSpPr>
+        <p:spPr/>
+      </p:sp>
+      <p:sp>
+        <p:nvSpPr>
+          <p:cNvPr id="3" name="Notes Placeholder 2"/>
+          <p:cNvSpPr>
+            <a:spLocks noGrp="1"/>
+          </p:cNvSpPr>
+          <p:nvPr>
+            <p:ph type="body" sz="quarter" idx="3"/>
+          </p:nvPr>
+        </p:nvSpPr>
+        <p:spPr/>
+        <p:txBody>
+          <a:bodyPr/>
+          <a:lstStyle/>
+          <a:p>
+            <a:r>
+              <a:t>=== REGRESSION ===</a:t>
+            </a:r>
+          </a:p>
+          <a:p>
+            <a:endParaRPr/>
+          </a:p>
+          <a:p>
+            <a:r>
+              <a:t>VotingRegressor : combine plusieurs modeles en moyennant leurs predictions.</a:t>
+            </a:r>
+          </a:p>
+          <a:p>
+            <a:r>
+              <a:t>  Avantage : stabilise les erreurs individuelles de chaque modele.</a:t>
+            </a:r>
+          </a:p>
+          <a:p>
+            <a:endParaRPr/>
+          </a:p>
+          <a:p>
+            <a:r>
+              <a:t>Ridge (alpha=10) : regression lineaire avec penalite L2 (somme des carres des coefficients).</a:t>
+            </a:r>
+          </a:p>
+          <a:p>
+            <a:r>
+              <a:t>  alpha = force de la regularisation. Grand alpha =&gt; coefficients plus petits =&gt; moins d'overfitting.</a:t>
+            </a:r>
+          </a:p>
+          <a:p>
+            <a:r>
+              <a:t>  Garde toutes les variables mais les reduit.</a:t>
+            </a:r>
+          </a:p>
+          <a:p>
+            <a:endParaRPr/>
+          </a:p>
+          <a:p>
+            <a:r>
+              <a:t>Lasso (alpha=0.1) : regression lineaire avec penalite L1 (somme des valeurs absolues).</a:t>
+            </a:r>
+          </a:p>
+          <a:p>
+            <a:r>
+              <a:t>  Peut mettre certains coefficients exactement a 0 =&gt; selection de variables automatique.</a:t>
+            </a:r>
+          </a:p>
+          <a:p>
+            <a:endParaRPr/>
+          </a:p>
+          <a:p>
+            <a:r>
+              <a:t>ElasticNet (alpha=0.1, l1_ratio=0.5) : combine Ridge (L2) et Lasso (L1).</a:t>
+            </a:r>
+          </a:p>
+          <a:p>
+            <a:r>
+              <a:t>  l1_ratio=0.5 =&gt; moitie L1, moitie L2. Meilleur des deux mondes.</a:t>
+            </a:r>
+          </a:p>
+          <a:p>
+            <a:endParaRPr/>
+          </a:p>
+          <a:p>
+            <a:r>
+              <a:t>R2 = 0.5232 : le modele explique 52% de la variance de la progression.</a:t>
+            </a:r>
+          </a:p>
+          <a:p>
+            <a:r>
+              <a:t>  R2 = 1 = prediction parfaite. R2 = 0 = modele nul (predit la moyenne).</a:t>
+            </a:r>
+          </a:p>
+          <a:p>
+            <a:r>
+              <a:t>  0.52 est correct pour ce dataset connu pour etre difficile (peu de donnees).</a:t>
+            </a:r>
+          </a:p>
+          <a:p>
+            <a:endParaRPr/>
+          </a:p>
+          <a:p>
+            <a:r>
+              <a:t>=== CLUSTERING ===</a:t>
+            </a:r>
+          </a:p>
+          <a:p>
+            <a:endParaRPr/>
+          </a:p>
+          <a:p>
+            <a:r>
+              <a:t>Clustering non supervise : on ne connait pas les groupes a l'avance, l'algo les decouvre.</a:t>
+            </a:r>
+          </a:p>
+          <a:p>
+            <a:endParaRPr/>
+          </a:p>
+          <a:p>
+            <a:r>
+              <a:t>AgglomerativeClustering : clustering hierarchique ascendant.</a:t>
+            </a:r>
+          </a:p>
+          <a:p>
+            <a:r>
+              <a:t>  Debut : chaque point est son propre cluster.</a:t>
+            </a:r>
+          </a:p>
+          <a:p>
+            <a:r>
+              <a:t>  Fusionne progressivement les clusters les plus proches jusqu'a atteindre n_clusters.</a:t>
+            </a:r>
+          </a:p>
+          <a:p>
+            <a:endParaRPr/>
+          </a:p>
+          <a:p>
+            <a:r>
+              <a:t>KMeans : l'autre algo teste. Place k centroides, assigne chaque point au plus proche.</a:t>
+            </a:r>
+          </a:p>
+          <a:p>
+            <a:r>
+              <a:t>  Agglomerative a gagne ici car meilleur score silhouette.</a:t>
+            </a:r>
+          </a:p>
+          <a:p>
+            <a:endParaRPr/>
+          </a:p>
+          <a:p>
+            <a:r>
+              <a:t>Score de silhouette : mesure la qualite de la separation des clusters.</a:t>
+            </a:r>
+          </a:p>
+          <a:p>
+            <a:r>
+              <a:t>  Entre -1 et 1. 1 = clusters parfaitement separes. 0.6 = bonne separation.</a:t>
+            </a:r>
+          </a:p>
+          <a:p>
+            <a:r>
+              <a:t>  0.6015 atteint exactement la cible fixee.</a:t>
+            </a:r>
+          </a:p>
+          <a:p>
+            <a:endParaRPr/>
+          </a:p>
+          <a:p>
+            <a:r>
+              <a:t>4 clusters sur sex + bmi : les 4 groupes de patients identifies par leurs profils biologiques.</a:t>
+            </a:r>
+          </a:p>
+        </p:txBody>
+      </p:sp>
+      <p:sp>
+        <p:nvSpPr>
+          <p:cNvPr id="4" name="Slide Number Placeholder 3"/>
+          <p:cNvSpPr>
+            <a:spLocks noGrp="1"/>
+          </p:cNvSpPr>
+          <p:nvPr>
+            <p:ph type="sldNum" sz="quarter" idx="5"/>
+          </p:nvPr>
+        </p:nvSpPr>
+        <p:spPr/>
+      </p:sp>
+    </p:spTree>
+  </p:cSld>
+  <p:clrMapOvr>
+    <a:masterClrMapping/>
+  </p:clrMapOvr>
+</p:notes>
+</file>
+
+<file path=ppt/notesSlides/notesSlide6.xml><?xml version="1.0" encoding="utf-8"?>
+<p:notes xmlns:a="http://schemas.openxmlformats.org/drawingml/2006/main" xmlns:r="http://schemas.openxmlformats.org/officeDocument/2006/relationships" xmlns:p="http://schemas.openxmlformats.org/presentationml/2006/main">
+  <p:cSld>
+    <p:spTree>
+      <p:nvGrpSpPr>
+        <p:cNvPr id="1" name=""/>
+        <p:cNvGrpSpPr/>
+        <p:nvPr/>
+      </p:nvGrpSpPr>
+      <p:grpSpPr>
+        <a:xfrm>
+          <a:off x="0" y="0"/>
+          <a:ext cx="0" cy="0"/>
+          <a:chOff x="0" y="0"/>
+          <a:chExt cx="0" cy="0"/>
+        </a:xfrm>
+      </p:grpSpPr>
+      <p:sp>
+        <p:nvSpPr>
+          <p:cNvPr id="2" name="Slide Image Placeholder 1"/>
+          <p:cNvSpPr>
+            <a:spLocks noGrp="1" noRot="1" noChangeAspect="1"/>
+          </p:cNvSpPr>
+          <p:nvPr>
+            <p:ph type="sldImg" idx="2"/>
+          </p:nvPr>
+        </p:nvSpPr>
+        <p:spPr/>
+      </p:sp>
+      <p:sp>
+        <p:nvSpPr>
+          <p:cNvPr id="3" name="Notes Placeholder 2"/>
+          <p:cNvSpPr>
+            <a:spLocks noGrp="1"/>
+          </p:cNvSpPr>
+          <p:nvPr>
+            <p:ph type="body" sz="quarter" idx="3"/>
+          </p:nvPr>
+        </p:nvSpPr>
+        <p:spPr/>
+        <p:txBody>
+          <a:bodyPr/>
+          <a:lstStyle/>
+          <a:p>
+            <a:r>
+              <a:t>Pendant la demo :</a:t>
+            </a:r>
+          </a:p>
+          <a:p>
+            <a:r>
+              <a:t>  1. Ouvrir l'URL HF Spaces dans le navigateur</a:t>
+            </a:r>
+          </a:p>
+          <a:p>
+            <a:r>
+              <a:t>  2. Saisir des valeurs dans le formulaire (age, bmi, etc.)</a:t>
+            </a:r>
+          </a:p>
+          <a:p>
+            <a:r>
+              <a:t>  3. Cliquer 'Predire' =&gt; FastAPI charge model-regression.pkl, renvoie la prediction en JSON</a:t>
+            </a:r>
+          </a:p>
+          <a:p>
+            <a:r>
+              <a:t>  4. React affiche le resultat sans rechargement de page</a:t>
+            </a:r>
+          </a:p>
+          <a:p>
+            <a:r>
+              <a:t>  5. Montrer aussi le cluster du patient</a:t>
+            </a:r>
+          </a:p>
+          <a:p>
+            <a:endParaRPr/>
+          </a:p>
+          <a:p>
+            <a:r>
+              <a:t>Si la demo plante : avoir un screenshot de secours ou une video en fallback.</a:t>
+            </a:r>
+          </a:p>
+          <a:p>
+            <a:r>
+              <a:t>CI/CD : montrer l'onglet Actions sur GitHub avec le dernier run vert.</a:t>
+            </a:r>
+          </a:p>
+        </p:txBody>
+      </p:sp>
+      <p:sp>
+        <p:nvSpPr>
+          <p:cNvPr id="4" name="Slide Number Placeholder 3"/>
+          <p:cNvSpPr>
+            <a:spLocks noGrp="1"/>
+          </p:cNvSpPr>
+          <p:nvPr>
+            <p:ph type="sldNum" sz="quarter" idx="5"/>
+          </p:nvPr>
+        </p:nvSpPr>
+        <p:spPr/>
+      </p:sp>
+    </p:spTree>
+  </p:cSld>
+  <p:clrMapOvr>
+    <a:masterClrMapping/>
+  </p:clrMapOvr>
+</p:notes>
+</file>
+
+<file path=ppt/notesSlides/notesSlide7.xml><?xml version="1.0" encoding="utf-8"?>
+<p:notes xmlns:a="http://schemas.openxmlformats.org/drawingml/2006/main" xmlns:r="http://schemas.openxmlformats.org/officeDocument/2006/relationships" xmlns:p="http://schemas.openxmlformats.org/presentationml/2006/main">
+  <p:cSld>
+    <p:spTree>
+      <p:nvGrpSpPr>
+        <p:cNvPr id="1" name=""/>
+        <p:cNvGrpSpPr/>
+        <p:nvPr/>
+      </p:nvGrpSpPr>
+      <p:grpSpPr>
+        <a:xfrm>
+          <a:off x="0" y="0"/>
+          <a:ext cx="0" cy="0"/>
+          <a:chOff x="0" y="0"/>
+          <a:chExt cx="0" cy="0"/>
+        </a:xfrm>
+      </p:grpSpPr>
+      <p:sp>
+        <p:nvSpPr>
+          <p:cNvPr id="2" name="Slide Image Placeholder 1"/>
+          <p:cNvSpPr>
+            <a:spLocks noGrp="1" noRot="1" noChangeAspect="1"/>
+          </p:cNvSpPr>
+          <p:nvPr>
+            <p:ph type="sldImg" idx="2"/>
+          </p:nvPr>
+        </p:nvSpPr>
+        <p:spPr/>
+      </p:sp>
+      <p:sp>
+        <p:nvSpPr>
+          <p:cNvPr id="3" name="Notes Placeholder 2"/>
+          <p:cNvSpPr>
+            <a:spLocks noGrp="1"/>
+          </p:cNvSpPr>
+          <p:nvPr>
+            <p:ph type="body" sz="quarter" idx="3"/>
+          </p:nvPr>
+        </p:nvSpPr>
+        <p:spPr/>
+        <p:txBody>
+          <a:bodyPr/>
+          <a:lstStyle/>
+          <a:p>
+            <a:r>
+              <a:t>R2 = 0.52 : acceptable mais pas excellent. Signifie que 48% de la variance reste inexpliquee.</a:t>
+            </a:r>
+          </a:p>
+          <a:p>
+            <a:r>
+              <a:t>  Causes possibles : features insuffisantes, relations non lineaires, dataset trop petit.</a:t>
+            </a:r>
+          </a:p>
+          <a:p>
+            <a:endParaRPr/>
+          </a:p>
+          <a:p>
+            <a:r>
+              <a:t>Cross-validation : technique qui divise les donnees en K plis et evalue le modele K fois.</a:t>
+            </a:r>
+          </a:p>
+          <a:p>
+            <a:r>
+              <a:t>  Donne une estimation plus fiable que un seul split train/test.</a:t>
+            </a:r>
+          </a:p>
+          <a:p>
+            <a:r>
+              <a:t>  On n'a pas eu le temps = honnete a dire.</a:t>
+            </a:r>
+          </a:p>
+          <a:p>
+            <a:endParaRPr/>
+          </a:p>
+          <a:p>
+            <a:r>
+              <a:t>Gunicorn : serveur Python de production, lance plusieurs workers en parallele.</a:t>
+            </a:r>
+          </a:p>
+          <a:p>
+            <a:r>
+              <a:t>  FastAPI seul = 1 requete a la fois. Gunicorn + 4 workers = 4 requetes simultanees.</a:t>
+            </a:r>
+          </a:p>
+        </p:txBody>
+      </p:sp>
+      <p:sp>
+        <p:nvSpPr>
+          <p:cNvPr id="4" name="Slide Number Placeholder 3"/>
+          <p:cNvSpPr>
+            <a:spLocks noGrp="1"/>
+          </p:cNvSpPr>
+          <p:nvPr>
+            <p:ph type="sldNum" sz="quarter" idx="5"/>
+          </p:nvPr>
+        </p:nvSpPr>
+        <p:spPr/>
+      </p:sp>
+    </p:spTree>
+  </p:cSld>
+  <p:clrMapOvr>
+    <a:masterClrMapping/>
+  </p:clrMapOvr>
+</p:notes>
+</file>
+
+<file path=ppt/notesSlides/notesSlide8.xml><?xml version="1.0" encoding="utf-8"?>
+<p:notes xmlns:a="http://schemas.openxmlformats.org/drawingml/2006/main" xmlns:r="http://schemas.openxmlformats.org/officeDocument/2006/relationships" xmlns:p="http://schemas.openxmlformats.org/presentationml/2006/main">
+  <p:cSld>
+    <p:spTree>
+      <p:nvGrpSpPr>
+        <p:cNvPr id="1" name=""/>
+        <p:cNvGrpSpPr/>
+        <p:nvPr/>
+      </p:nvGrpSpPr>
+      <p:grpSpPr>
+        <a:xfrm>
+          <a:off x="0" y="0"/>
+          <a:ext cx="0" cy="0"/>
+          <a:chOff x="0" y="0"/>
+          <a:chExt cx="0" cy="0"/>
+        </a:xfrm>
+      </p:grpSpPr>
+      <p:sp>
+        <p:nvSpPr>
+          <p:cNvPr id="2" name="Slide Image Placeholder 1"/>
+          <p:cNvSpPr>
+            <a:spLocks noGrp="1" noRot="1" noChangeAspect="1"/>
+          </p:cNvSpPr>
+          <p:nvPr>
+            <p:ph type="sldImg" idx="2"/>
+          </p:nvPr>
+        </p:nvSpPr>
+        <p:spPr/>
+      </p:sp>
+      <p:sp>
+        <p:nvSpPr>
+          <p:cNvPr id="3" name="Notes Placeholder 2"/>
+          <p:cNvSpPr>
+            <a:spLocks noGrp="1"/>
+          </p:cNvSpPr>
+          <p:nvPr>
+            <p:ph type="body" sz="quarter" idx="3"/>
+          </p:nvPr>
+        </p:nvSpPr>
+        <p:spPr/>
+        <p:txBody>
+          <a:bodyPr/>
+          <a:lstStyle/>
+          <a:p>
+            <a:r>
+              <a:t>Conseils pour le Q&amp;A :</a:t>
+            </a:r>
+          </a:p>
+          <a:p>
+            <a:r>
+              <a:t>  - Regarder le jury, pas l'ecran</a:t>
+            </a:r>
+          </a:p>
+          <a:p>
+            <a:r>
+              <a:t>  - Si vous ne savez pas : 'Je ne sais pas precisement mais je pense que...' vaut mieux qu'inventer</a:t>
+            </a:r>
+          </a:p>
+          <a:p>
+            <a:r>
+              <a:t>  - Assumez vos choix : 'On a choisi X parce que Y' pas 'le prof a dit de faire X'</a:t>
+            </a:r>
+          </a:p>
+          <a:p>
+            <a:r>
+              <a:t>  - Reconnaitre les limites : ca montre la maturite technique</a:t>
+            </a:r>
+          </a:p>
+          <a:p>
+            <a:endParaRPr/>
+          </a:p>
+          <a:p>
+            <a:r>
+              <a:t>Question bonus probable : 'Pourquoi React + FastAPI plutot que Streamlit ?'</a:t>
+            </a:r>
+          </a:p>
+          <a:p>
+            <a:r>
+              <a:t>  =&gt; 'Streamlit est bien pour les prototypes mais React donne une vraie UX prod. FastAPI est plus performant et separable du frontend.'</a:t>
+            </a:r>
+          </a:p>
+        </p:txBody>
+      </p:sp>
+      <p:sp>
+        <p:nvSpPr>
+          <p:cNvPr id="4" name="Slide Number Placeholder 3"/>
+          <p:cNvSpPr>
+            <a:spLocks noGrp="1"/>
+          </p:cNvSpPr>
+          <p:nvPr>
+            <p:ph type="sldNum" sz="quarter" idx="5"/>
+          </p:nvPr>
+        </p:nvSpPr>
+        <p:spPr/>
+      </p:sp>
+    </p:spTree>
+  </p:cSld>
+  <p:clrMapOvr>
+    <a:masterClrMapping/>
+  </p:clrMapOvr>
+</p:notes>
+</file>
+
+<file path=ppt/notesSlides/notesSlide9.xml><?xml version="1.0" encoding="utf-8"?>
+<p:notes xmlns:a="http://schemas.openxmlformats.org/drawingml/2006/main" xmlns:r="http://schemas.openxmlformats.org/officeDocument/2006/relationships" xmlns:p="http://schemas.openxmlformats.org/presentationml/2006/main">
+  <p:cSld>
+    <p:spTree>
+      <p:nvGrpSpPr>
+        <p:cNvPr id="1" name=""/>
+        <p:cNvGrpSpPr/>
+        <p:nvPr/>
+      </p:nvGrpSpPr>
+      <p:grpSpPr>
+        <a:xfrm>
+          <a:off x="0" y="0"/>
+          <a:ext cx="0" cy="0"/>
+          <a:chOff x="0" y="0"/>
+          <a:chExt cx="0" cy="0"/>
+        </a:xfrm>
+      </p:grpSpPr>
+      <p:sp>
+        <p:nvSpPr>
+          <p:cNvPr id="2" name="Slide Image Placeholder 1"/>
+          <p:cNvSpPr>
+            <a:spLocks noGrp="1" noRot="1" noChangeAspect="1"/>
+          </p:cNvSpPr>
+          <p:nvPr>
+            <p:ph type="sldImg" idx="2"/>
+          </p:nvPr>
+        </p:nvSpPr>
+        <p:spPr/>
+      </p:sp>
+      <p:sp>
+        <p:nvSpPr>
+          <p:cNvPr id="3" name="Notes Placeholder 2"/>
+          <p:cNvSpPr>
+            <a:spLocks noGrp="1"/>
+          </p:cNvSpPr>
+          <p:nvPr>
+            <p:ph type="body" sz="quarter" idx="3"/>
+          </p:nvPr>
+        </p:nvSpPr>
+        <p:spPr/>
+        <p:txBody>
+          <a:bodyPr/>
+          <a:lstStyle/>
+          <a:p>
+            <a:r>
+              <a:t>Recap scoring :</a:t>
+            </a:r>
+          </a:p>
+          <a:p>
+            <a:r>
+              <a:t>  /3 Probleme + Dataset : probleme metier clair, dataset presente avec limites</a:t>
+            </a:r>
+          </a:p>
+          <a:p>
+            <a:r>
+              <a:t>  /3 Pipeline : reproductible, split correct, preprocessing justifie</a:t>
+            </a:r>
+          </a:p>
+          <a:p>
+            <a:r>
+              <a:t>  /4 Modele : R2 commente, comparaison Ridge/Lasso/ElasticNet, pkl exporte</a:t>
+            </a:r>
+          </a:p>
+          <a:p>
+            <a:r>
+              <a:t>  /5 App + Deploy : HF Spaces public, demo qui marche, CI/CD = +1 bonus</a:t>
+            </a:r>
+          </a:p>
+          <a:p>
+            <a:r>
+              <a:t>  /5 Oral : structure, Q&amp;A, chacun parle, assume ses choix</a:t>
+            </a:r>
+          </a:p>
+          <a:p>
+            <a:endParaRPr/>
+          </a:p>
+          <a:p>
+            <a:r>
+              <a:t>Cible realiste pour ce niveau B3 : 14-16/20</a:t>
+            </a:r>
+          </a:p>
+        </p:txBody>
+      </p:sp>
+      <p:sp>
+        <p:nvSpPr>
+          <p:cNvPr id="4" name="Slide Number Placeholder 3"/>
+          <p:cNvSpPr>
+            <a:spLocks noGrp="1"/>
+          </p:cNvSpPr>
+          <p:nvPr>
+            <p:ph type="sldNum" sz="quarter" idx="5"/>
+          </p:nvPr>
+        </p:nvSpPr>
+        <p:spPr/>
+      </p:sp>
+    </p:spTree>
+  </p:cSld>
+  <p:clrMapOvr>
+    <a:masterClrMapping/>
+  </p:clrMapOvr>
+</p:notes>
 </file>
 
 <file path=ppt/slideLayouts/slideLayout1.xml><?xml version="1.0" encoding="utf-8"?>
@@ -3561,7 +4778,7 @@
                   <a:srgbClr val="0F172A"/>
                 </a:solidFill>
               </a:rPr>
-              <a:t>Hébergement</a:t>
+              <a:t>Hébergement + Docker</a:t>
             </a:r>
             <a:endParaRPr sz="1300" b="1" dirty="0">
               <a:solidFill>
@@ -3650,40 +4867,6 @@
       </p:sp>
       <p:sp>
         <p:nvSpPr>
-          <p:cNvPr id="3" name="TextBox 2"/>
-          <p:cNvSpPr txBox="1"/>
-          <p:nvPr/>
-        </p:nvSpPr>
-        <p:spPr>
-          <a:xfrm>
-            <a:off x="640080" y="182880"/>
-            <a:ext cx="10972800" cy="502920"/>
-          </a:xfrm>
-          <a:prstGeom prst="rect">
-            <a:avLst/>
-          </a:prstGeom>
-          <a:noFill/>
-        </p:spPr>
-        <p:txBody>
-          <a:bodyPr wrap="square">
-            <a:spAutoFit/>
-          </a:bodyPr>
-          <a:lstStyle/>
-          <a:p>
-            <a:pPr algn="l"/>
-            <a:r>
-              <a:rPr sz="1400" b="1">
-                <a:solidFill>
-                  <a:srgbClr val="38BDF8"/>
-                </a:solidFill>
-              </a:rPr>
-              <a:t>Plan -- 10 min</a:t>
-            </a:r>
-          </a:p>
-        </p:txBody>
-      </p:sp>
-      <p:sp>
-        <p:nvSpPr>
           <p:cNvPr id="4" name="Rectangle 3"/>
           <p:cNvSpPr/>
           <p:nvPr/>
@@ -3769,40 +4952,6 @@
       </p:sp>
       <p:sp>
         <p:nvSpPr>
-          <p:cNvPr id="6" name="TextBox 5"/>
-          <p:cNvSpPr txBox="1"/>
-          <p:nvPr/>
-        </p:nvSpPr>
-        <p:spPr>
-          <a:xfrm>
-            <a:off x="10332720" y="1097280"/>
-            <a:ext cx="1371600" cy="365760"/>
-          </a:xfrm>
-          <a:prstGeom prst="rect">
-            <a:avLst/>
-          </a:prstGeom>
-          <a:noFill/>
-        </p:spPr>
-        <p:txBody>
-          <a:bodyPr wrap="square">
-            <a:spAutoFit/>
-          </a:bodyPr>
-          <a:lstStyle/>
-          <a:p>
-            <a:pPr algn="r"/>
-            <a:r>
-              <a:rPr sz="1300" b="0">
-                <a:solidFill>
-                  <a:srgbClr val="CBD5E1"/>
-                </a:solidFill>
-              </a:rPr>
-              <a:t>~2 min</a:t>
-            </a:r>
-          </a:p>
-        </p:txBody>
-      </p:sp>
-      <p:sp>
-        <p:nvSpPr>
           <p:cNvPr id="7" name="Rectangle 6"/>
           <p:cNvSpPr/>
           <p:nvPr/>
@@ -3888,40 +5037,6 @@
       </p:sp>
       <p:sp>
         <p:nvSpPr>
-          <p:cNvPr id="9" name="TextBox 8"/>
-          <p:cNvSpPr txBox="1"/>
-          <p:nvPr/>
-        </p:nvSpPr>
-        <p:spPr>
-          <a:xfrm>
-            <a:off x="10332720" y="1920240"/>
-            <a:ext cx="1371600" cy="365760"/>
-          </a:xfrm>
-          <a:prstGeom prst="rect">
-            <a:avLst/>
-          </a:prstGeom>
-          <a:noFill/>
-        </p:spPr>
-        <p:txBody>
-          <a:bodyPr wrap="square">
-            <a:spAutoFit/>
-          </a:bodyPr>
-          <a:lstStyle/>
-          <a:p>
-            <a:pPr algn="r"/>
-            <a:r>
-              <a:rPr sz="1300" b="0">
-                <a:solidFill>
-                  <a:srgbClr val="CBD5E1"/>
-                </a:solidFill>
-              </a:rPr>
-              <a:t>~2 min</a:t>
-            </a:r>
-          </a:p>
-        </p:txBody>
-      </p:sp>
-      <p:sp>
-        <p:nvSpPr>
           <p:cNvPr id="10" name="Rectangle 9"/>
           <p:cNvSpPr/>
           <p:nvPr/>
@@ -4007,40 +5122,6 @@
       </p:sp>
       <p:sp>
         <p:nvSpPr>
-          <p:cNvPr id="12" name="TextBox 11"/>
-          <p:cNvSpPr txBox="1"/>
-          <p:nvPr/>
-        </p:nvSpPr>
-        <p:spPr>
-          <a:xfrm>
-            <a:off x="10332720" y="2743200"/>
-            <a:ext cx="1371600" cy="365760"/>
-          </a:xfrm>
-          <a:prstGeom prst="rect">
-            <a:avLst/>
-          </a:prstGeom>
-          <a:noFill/>
-        </p:spPr>
-        <p:txBody>
-          <a:bodyPr wrap="square">
-            <a:spAutoFit/>
-          </a:bodyPr>
-          <a:lstStyle/>
-          <a:p>
-            <a:pPr algn="r"/>
-            <a:r>
-              <a:rPr sz="1300" b="0">
-                <a:solidFill>
-                  <a:srgbClr val="CBD5E1"/>
-                </a:solidFill>
-              </a:rPr>
-              <a:t>~2 min</a:t>
-            </a:r>
-          </a:p>
-        </p:txBody>
-      </p:sp>
-      <p:sp>
-        <p:nvSpPr>
           <p:cNvPr id="13" name="Rectangle 12"/>
           <p:cNvSpPr/>
           <p:nvPr/>
@@ -4126,40 +5207,6 @@
       </p:sp>
       <p:sp>
         <p:nvSpPr>
-          <p:cNvPr id="15" name="TextBox 14"/>
-          <p:cNvSpPr txBox="1"/>
-          <p:nvPr/>
-        </p:nvSpPr>
-        <p:spPr>
-          <a:xfrm>
-            <a:off x="10332720" y="3566160"/>
-            <a:ext cx="1371600" cy="365760"/>
-          </a:xfrm>
-          <a:prstGeom prst="rect">
-            <a:avLst/>
-          </a:prstGeom>
-          <a:noFill/>
-        </p:spPr>
-        <p:txBody>
-          <a:bodyPr wrap="square">
-            <a:spAutoFit/>
-          </a:bodyPr>
-          <a:lstStyle/>
-          <a:p>
-            <a:pPr algn="r"/>
-            <a:r>
-              <a:rPr sz="1300" b="0">
-                <a:solidFill>
-                  <a:srgbClr val="CBD5E1"/>
-                </a:solidFill>
-              </a:rPr>
-              <a:t>~2 min</a:t>
-            </a:r>
-          </a:p>
-        </p:txBody>
-      </p:sp>
-      <p:sp>
-        <p:nvSpPr>
           <p:cNvPr id="16" name="Rectangle 15"/>
           <p:cNvSpPr/>
           <p:nvPr/>
@@ -4245,40 +5292,6 @@
       </p:sp>
       <p:sp>
         <p:nvSpPr>
-          <p:cNvPr id="18" name="TextBox 17"/>
-          <p:cNvSpPr txBox="1"/>
-          <p:nvPr/>
-        </p:nvSpPr>
-        <p:spPr>
-          <a:xfrm>
-            <a:off x="10332720" y="4389120"/>
-            <a:ext cx="1371600" cy="365760"/>
-          </a:xfrm>
-          <a:prstGeom prst="rect">
-            <a:avLst/>
-          </a:prstGeom>
-          <a:noFill/>
-        </p:spPr>
-        <p:txBody>
-          <a:bodyPr wrap="square">
-            <a:spAutoFit/>
-          </a:bodyPr>
-          <a:lstStyle/>
-          <a:p>
-            <a:pPr algn="r"/>
-            <a:r>
-              <a:rPr sz="1300" b="0">
-                <a:solidFill>
-                  <a:srgbClr val="CBD5E1"/>
-                </a:solidFill>
-              </a:rPr>
-              <a:t>~1 min</a:t>
-            </a:r>
-          </a:p>
-        </p:txBody>
-      </p:sp>
-      <p:sp>
-        <p:nvSpPr>
           <p:cNvPr id="19" name="Rectangle 18"/>
           <p:cNvSpPr/>
           <p:nvPr/>
@@ -4358,40 +5371,6 @@
                 </a:solidFill>
               </a:rPr>
               <a:t>Questions</a:t>
-            </a:r>
-          </a:p>
-        </p:txBody>
-      </p:sp>
-      <p:sp>
-        <p:nvSpPr>
-          <p:cNvPr id="21" name="TextBox 20"/>
-          <p:cNvSpPr txBox="1"/>
-          <p:nvPr/>
-        </p:nvSpPr>
-        <p:spPr>
-          <a:xfrm>
-            <a:off x="10332720" y="5212080"/>
-            <a:ext cx="1371600" cy="365760"/>
-          </a:xfrm>
-          <a:prstGeom prst="rect">
-            <a:avLst/>
-          </a:prstGeom>
-          <a:noFill/>
-        </p:spPr>
-        <p:txBody>
-          <a:bodyPr wrap="square">
-            <a:spAutoFit/>
-          </a:bodyPr>
-          <a:lstStyle/>
-          <a:p>
-            <a:pPr algn="r"/>
-            <a:r>
-              <a:rPr sz="1300" b="0">
-                <a:solidFill>
-                  <a:srgbClr val="CBD5E1"/>
-                </a:solidFill>
-              </a:rPr>
-              <a:t>~3 min</a:t>
             </a:r>
           </a:p>
         </p:txBody>
@@ -6598,7 +7577,7 @@
                 <a:solidFill>
                   <a:srgbClr val="CBD5E1"/>
                 </a:solidFill>
-                <a:hlinkClick r:id="rId2"/>
+                <a:hlinkClick r:id="rId3"/>
               </a:rPr>
               <a:t>https://data-ia-claude.arsdv.site</a:t>
             </a:r>
@@ -6802,20 +7781,12 @@
               <a:t>mois</a:t>
             </a:r>
             <a:r>
-              <a:rPr sz="1500" b="0" dirty="0">
+              <a:rPr lang="fr-FR" sz="1500" b="0" dirty="0">
                 <a:solidFill>
                   <a:srgbClr val="34D399"/>
                 </a:solidFill>
               </a:rPr>
-              <a:t> sur </a:t>
-            </a:r>
-            <a:r>
-              <a:rPr lang="fr-FR" sz="1500" b="0" dirty="0">
-                <a:solidFill>
-                  <a:srgbClr val="34D399"/>
-                </a:solidFill>
-              </a:rPr>
-              <a:t>un serveur chez Adrien</a:t>
+              <a:t>, app hébergé sur un serveur chez Adrien</a:t>
             </a:r>
             <a:endParaRPr sz="1500" b="0" dirty="0">
               <a:solidFill>
@@ -7390,7 +8361,7 @@
         <p:spPr>
           <a:xfrm>
             <a:off x="6400800" y="1051560"/>
-            <a:ext cx="5212080" cy="338554"/>
+            <a:ext cx="5212080" cy="365760"/>
           </a:xfrm>
           <a:prstGeom prst="rect">
             <a:avLst/>
@@ -7405,18 +8376,13 @@
           <a:p>
             <a:pPr algn="l"/>
             <a:r>
-              <a:rPr lang="fr-FR" sz="1600" b="1" dirty="0">
+              <a:rPr sz="1600" b="1">
                 <a:solidFill>
                   <a:srgbClr val="34D399"/>
                 </a:solidFill>
               </a:rPr>
-              <a:t>Et après …</a:t>
-            </a:r>
-            <a:endParaRPr sz="1600" b="1" dirty="0">
-              <a:solidFill>
-                <a:srgbClr val="34D399"/>
-              </a:solidFill>
-            </a:endParaRPr>
+              <a:t>Avec 1 mois de plus...</a:t>
+            </a:r>
           </a:p>
         </p:txBody>
       </p:sp>
@@ -8046,7 +9012,7 @@
         <p:spPr>
           <a:xfrm>
             <a:off x="548640" y="3172968"/>
-            <a:ext cx="11064240" cy="365760"/>
+            <a:ext cx="11064240" cy="276999"/>
           </a:xfrm>
           <a:prstGeom prst="rect">
             <a:avLst/>
@@ -8061,13 +9027,58 @@
           <a:p>
             <a:pPr algn="l"/>
             <a:r>
-              <a:rPr sz="1200" b="0">
+              <a:rPr sz="1200" b="0" dirty="0">
                 <a:solidFill>
                   <a:srgbClr val="34D399"/>
                 </a:solidFill>
               </a:rPr>
-              <a:t>Git push =&gt; CI/CD GitHub Actions se declenche =&gt; HF Spaces se redeploie automatiquement.</a:t>
-            </a:r>
+              <a:t>Git push =&gt; CI/CD GitHub Actions se </a:t>
+            </a:r>
+            <a:r>
+              <a:rPr sz="1200" b="0" dirty="0" err="1">
+                <a:solidFill>
+                  <a:srgbClr val="34D399"/>
+                </a:solidFill>
+              </a:rPr>
+              <a:t>declenche</a:t>
+            </a:r>
+            <a:r>
+              <a:rPr sz="1200" b="0" dirty="0">
+                <a:solidFill>
+                  <a:srgbClr val="34D399"/>
+                </a:solidFill>
+              </a:rPr>
+              <a:t> =&gt; </a:t>
+            </a:r>
+            <a:r>
+              <a:rPr lang="fr-FR" sz="1200" b="0" dirty="0">
+                <a:solidFill>
+                  <a:srgbClr val="34D399"/>
+                </a:solidFill>
+              </a:rPr>
+              <a:t>le serveur prend le Job et </a:t>
+            </a:r>
+            <a:r>
+              <a:rPr lang="fr-FR" sz="1200" b="0" dirty="0" err="1">
+                <a:solidFill>
+                  <a:srgbClr val="34D399"/>
+                </a:solidFill>
+              </a:rPr>
+              <a:t>déploi</a:t>
+            </a:r>
+            <a:r>
+              <a:rPr lang="fr-FR" sz="1200" b="0" dirty="0">
+                <a:solidFill>
+                  <a:srgbClr val="34D399"/>
+                </a:solidFill>
+              </a:rPr>
+              <a:t> l’Application</a:t>
+            </a:r>
+            <a:endParaRPr sz="1200" b="0" dirty="0">
+              <a:solidFill>
+                <a:srgbClr val="34D399"/>
+              </a:solidFill>
+            </a:endParaRPr>
           </a:p>
         </p:txBody>
       </p:sp>
@@ -8158,7 +9169,7 @@
         <p:spPr>
           <a:xfrm>
             <a:off x="548640" y="4133088"/>
-            <a:ext cx="11064240" cy="365760"/>
+            <a:ext cx="11064240" cy="276999"/>
           </a:xfrm>
           <a:prstGeom prst="rect">
             <a:avLst/>
@@ -8178,40 +9189,21 @@
                   <a:srgbClr val="34D399"/>
                 </a:solidFill>
               </a:rPr>
-              <a:t>0 EUR -- HF Spaces free tier. Pas de </a:t>
-            </a:r>
-            <a:r>
-              <a:rPr sz="1200" b="0" dirty="0" err="1">
+              <a:t>0 EUR </a:t>
+            </a:r>
+            <a:r>
+              <a:rPr lang="fr-FR" sz="1200" dirty="0">
                 <a:solidFill>
                   <a:srgbClr val="34D399"/>
                 </a:solidFill>
               </a:rPr>
-              <a:t>serveur</a:t>
-            </a:r>
-            <a:r>
-              <a:rPr sz="1200" b="0" dirty="0">
-                <a:solidFill>
-                  <a:srgbClr val="34D399"/>
-                </a:solidFill>
-              </a:rPr>
-              <a:t> a </a:t>
-            </a:r>
-            <a:r>
-              <a:rPr sz="1200" b="0" dirty="0" err="1">
-                <a:solidFill>
-                  <a:srgbClr val="34D399"/>
-                </a:solidFill>
-              </a:rPr>
-              <a:t>gerer</a:t>
-            </a:r>
-            <a:r>
-              <a:rPr sz="1200" b="0" dirty="0">
-                <a:solidFill>
-                  <a:srgbClr val="34D399"/>
-                </a:solidFill>
-              </a:rPr>
-              <a:t>.</a:t>
-            </a:r>
+              <a:t>– Application Hébergée chez Adrien.</a:t>
+            </a:r>
+            <a:endParaRPr sz="1200" b="0" dirty="0">
+              <a:solidFill>
+                <a:srgbClr val="34D399"/>
+              </a:solidFill>
+            </a:endParaRPr>
           </a:p>
         </p:txBody>
       </p:sp>
@@ -8380,7 +9372,7 @@
         <p:spPr>
           <a:xfrm>
             <a:off x="548640" y="5641848"/>
-            <a:ext cx="11064240" cy="307777"/>
+            <a:ext cx="11064240" cy="384048"/>
           </a:xfrm>
           <a:prstGeom prst="rect">
             <a:avLst/>
@@ -8395,44 +9387,12 @@
           <a:p>
             <a:pPr algn="l"/>
             <a:r>
-              <a:rPr sz="1400" b="1" dirty="0">
+              <a:rPr sz="1400" b="1">
                 <a:solidFill>
                   <a:srgbClr val="FFFFFF"/>
                 </a:solidFill>
               </a:rPr>
-              <a:t>Q6: Avec </a:t>
-            </a:r>
-            <a:r>
-              <a:rPr lang="fr-FR" sz="1400" b="1" dirty="0">
-                <a:solidFill>
-                  <a:srgbClr val="FFFFFF"/>
-                </a:solidFill>
-              </a:rPr>
-              <a:t>plus de temps</a:t>
-            </a:r>
-            <a:r>
-              <a:rPr sz="1400" b="1" dirty="0">
-                <a:solidFill>
-                  <a:srgbClr val="FFFFFF"/>
-                </a:solidFill>
-              </a:rPr>
-              <a:t>, vous </a:t>
-            </a:r>
-            <a:r>
-              <a:rPr sz="1400" b="1" dirty="0" err="1">
-                <a:solidFill>
-                  <a:srgbClr val="FFFFFF"/>
-                </a:solidFill>
-              </a:rPr>
-              <a:t>auriez</a:t>
-            </a:r>
-            <a:r>
-              <a:rPr sz="1400" b="1" dirty="0">
-                <a:solidFill>
-                  <a:srgbClr val="FFFFFF"/>
-                </a:solidFill>
-              </a:rPr>
-              <a:t> fait quoi ?</a:t>
+              <a:t>Q6: Avec 1 mois de plus, vous auriez fait quoi ?</a:t>
             </a:r>
           </a:p>
         </p:txBody>
@@ -8732,893 +9692,41 @@
                 <a:solidFill>
                   <a:srgbClr val="CBD5E1"/>
                 </a:solidFill>
-                <a:hlinkClick r:id="rId2"/>
+                <a:hlinkClick r:id="rId3"/>
               </a:rPr>
               <a:t>https://data-ia-claude.arsdv.site</a:t>
             </a:r>
             <a:r>
+              <a:rPr sz="1700" b="0" dirty="0">
+                <a:solidFill>
+                  <a:srgbClr val="CBD5E1"/>
+                </a:solidFill>
+                <a:hlinkClick r:id="rId3"/>
+              </a:rPr>
+              <a:t>  </a:t>
+            </a:r>
+            <a:r>
+              <a:rPr sz="1700" b="0" dirty="0">
+                <a:solidFill>
+                  <a:srgbClr val="CBD5E1"/>
+                </a:solidFill>
+              </a:rPr>
+              <a:t>|  </a:t>
+            </a:r>
+            <a:r>
               <a:rPr lang="fr-FR" sz="1700" dirty="0">
                 <a:solidFill>
                   <a:srgbClr val="CBD5E1"/>
                 </a:solidFill>
-              </a:rPr>
-              <a:t> </a:t>
-            </a:r>
-            <a:r>
-              <a:rPr sz="1700" b="0" dirty="0">
-                <a:solidFill>
-                  <a:srgbClr val="CBD5E1"/>
-                </a:solidFill>
-              </a:rPr>
-              <a:t>|  </a:t>
-            </a:r>
-            <a:r>
-              <a:rPr lang="fr-FR" sz="1700" b="0" dirty="0">
-                <a:solidFill>
-                  <a:srgbClr val="CBD5E1"/>
-                </a:solidFill>
-                <a:hlinkClick r:id="rId3"/>
-              </a:rPr>
-              <a:t>https://</a:t>
-            </a:r>
-            <a:r>
-              <a:rPr sz="1700" b="0" dirty="0">
-                <a:solidFill>
-                  <a:srgbClr val="CBD5E1"/>
-                </a:solidFill>
-                <a:hlinkClick r:id="rId3"/>
-              </a:rPr>
-              <a:t>github.com/</a:t>
-            </a:r>
-            <a:r>
-              <a:rPr lang="fr-FR" sz="1700" dirty="0">
-                <a:solidFill>
-                  <a:srgbClr val="CBD5E1"/>
-                </a:solidFill>
-                <a:hlinkClick r:id="rId3"/>
-              </a:rPr>
-              <a:t>driri85/data-</a:t>
-            </a:r>
-            <a:r>
-              <a:rPr lang="fr-FR" sz="1700" dirty="0" err="1">
-                <a:solidFill>
-                  <a:srgbClr val="CBD5E1"/>
-                </a:solidFill>
-                <a:hlinkClick r:id="rId3"/>
-              </a:rPr>
-              <a:t>ia</a:t>
-            </a:r>
-            <a:r>
-              <a:rPr lang="fr-FR" sz="1700" dirty="0">
-                <a:solidFill>
-                  <a:srgbClr val="CBD5E1"/>
-                </a:solidFill>
-                <a:hlinkClick r:id="rId3"/>
-              </a:rPr>
-              <a:t>-</a:t>
-            </a:r>
-            <a:r>
-              <a:rPr lang="fr-FR" sz="1700" dirty="0" err="1">
-                <a:solidFill>
-                  <a:srgbClr val="CBD5E1"/>
-                </a:solidFill>
-                <a:hlinkClick r:id="rId3"/>
-              </a:rPr>
-              <a:t>claude</a:t>
+                <a:hlinkClick r:id="rId4"/>
+              </a:rPr>
+              <a:t>https://github.com/driri85/data-ia-claude</a:t>
             </a:r>
             <a:endParaRPr sz="1700" b="0" dirty="0">
               <a:solidFill>
                 <a:srgbClr val="CBD5E1"/>
               </a:solidFill>
             </a:endParaRPr>
-          </a:p>
-        </p:txBody>
-      </p:sp>
-      <p:sp>
-        <p:nvSpPr>
-          <p:cNvPr id="8" name="Rectangle 7"/>
-          <p:cNvSpPr/>
-          <p:nvPr/>
-        </p:nvSpPr>
-        <p:spPr>
-          <a:xfrm>
-            <a:off x="502920" y="4617720"/>
-            <a:ext cx="1737360" cy="1554480"/>
-          </a:xfrm>
-          <a:prstGeom prst="rect">
-            <a:avLst/>
-          </a:prstGeom>
-          <a:solidFill>
-            <a:srgbClr val="1E293B"/>
-          </a:solidFill>
-          <a:ln>
-            <a:noFill/>
-          </a:ln>
-        </p:spPr>
-        <p:style>
-          <a:lnRef idx="1">
-            <a:schemeClr val="accent1"/>
-          </a:lnRef>
-          <a:fillRef idx="3">
-            <a:schemeClr val="accent1"/>
-          </a:fillRef>
-          <a:effectRef idx="2">
-            <a:schemeClr val="accent1"/>
-          </a:effectRef>
-          <a:fontRef idx="minor">
-            <a:schemeClr val="lt1"/>
-          </a:fontRef>
-        </p:style>
-        <p:txBody>
-          <a:bodyPr rtlCol="0" anchor="ctr"/>
-          <a:lstStyle/>
-          <a:p>
-            <a:pPr algn="ctr"/>
-            <a:endParaRPr/>
-          </a:p>
-        </p:txBody>
-      </p:sp>
-      <p:sp>
-        <p:nvSpPr>
-          <p:cNvPr id="9" name="TextBox 8"/>
-          <p:cNvSpPr txBox="1"/>
-          <p:nvPr/>
-        </p:nvSpPr>
-        <p:spPr>
-          <a:xfrm>
-            <a:off x="502920" y="4663440"/>
-            <a:ext cx="1737360" cy="731520"/>
-          </a:xfrm>
-          <a:prstGeom prst="rect">
-            <a:avLst/>
-          </a:prstGeom>
-          <a:noFill/>
-        </p:spPr>
-        <p:txBody>
-          <a:bodyPr wrap="square">
-            <a:spAutoFit/>
-          </a:bodyPr>
-          <a:lstStyle/>
-          <a:p>
-            <a:pPr algn="ctr"/>
-            <a:r>
-              <a:rPr sz="3000" b="1">
-                <a:solidFill>
-                  <a:srgbClr val="38BDF8"/>
-                </a:solidFill>
-              </a:rPr>
-              <a:t>/3</a:t>
-            </a:r>
-          </a:p>
-        </p:txBody>
-      </p:sp>
-      <p:sp>
-        <p:nvSpPr>
-          <p:cNvPr id="10" name="TextBox 9"/>
-          <p:cNvSpPr txBox="1"/>
-          <p:nvPr/>
-        </p:nvSpPr>
-        <p:spPr>
-          <a:xfrm>
-            <a:off x="502920" y="5349240"/>
-            <a:ext cx="1737360" cy="320040"/>
-          </a:xfrm>
-          <a:prstGeom prst="rect">
-            <a:avLst/>
-          </a:prstGeom>
-          <a:noFill/>
-        </p:spPr>
-        <p:txBody>
-          <a:bodyPr wrap="square">
-            <a:spAutoFit/>
-          </a:bodyPr>
-          <a:lstStyle/>
-          <a:p>
-            <a:pPr algn="ctr"/>
-            <a:r>
-              <a:rPr sz="1200" b="0">
-                <a:solidFill>
-                  <a:srgbClr val="CBD5E1"/>
-                </a:solidFill>
-              </a:rPr>
-              <a:t>Probleme</a:t>
-            </a:r>
-          </a:p>
-        </p:txBody>
-      </p:sp>
-      <p:sp>
-        <p:nvSpPr>
-          <p:cNvPr id="11" name="TextBox 10"/>
-          <p:cNvSpPr txBox="1"/>
-          <p:nvPr/>
-        </p:nvSpPr>
-        <p:spPr>
-          <a:xfrm>
-            <a:off x="502920" y="5669280"/>
-            <a:ext cx="1737360" cy="320040"/>
-          </a:xfrm>
-          <a:prstGeom prst="rect">
-            <a:avLst/>
-          </a:prstGeom>
-          <a:noFill/>
-        </p:spPr>
-        <p:txBody>
-          <a:bodyPr wrap="square">
-            <a:spAutoFit/>
-          </a:bodyPr>
-          <a:lstStyle/>
-          <a:p>
-            <a:pPr algn="ctr"/>
-            <a:r>
-              <a:rPr sz="1200" b="0">
-                <a:solidFill>
-                  <a:srgbClr val="CBD5E1"/>
-                </a:solidFill>
-              </a:rPr>
-              <a:t>Dataset</a:t>
-            </a:r>
-          </a:p>
-        </p:txBody>
-      </p:sp>
-      <p:sp>
-        <p:nvSpPr>
-          <p:cNvPr id="12" name="Rectangle 11"/>
-          <p:cNvSpPr/>
-          <p:nvPr/>
-        </p:nvSpPr>
-        <p:spPr>
-          <a:xfrm>
-            <a:off x="2377439" y="4617720"/>
-            <a:ext cx="1737360" cy="1554480"/>
-          </a:xfrm>
-          <a:prstGeom prst="rect">
-            <a:avLst/>
-          </a:prstGeom>
-          <a:solidFill>
-            <a:srgbClr val="1E293B"/>
-          </a:solidFill>
-          <a:ln>
-            <a:noFill/>
-          </a:ln>
-        </p:spPr>
-        <p:style>
-          <a:lnRef idx="1">
-            <a:schemeClr val="accent1"/>
-          </a:lnRef>
-          <a:fillRef idx="3">
-            <a:schemeClr val="accent1"/>
-          </a:fillRef>
-          <a:effectRef idx="2">
-            <a:schemeClr val="accent1"/>
-          </a:effectRef>
-          <a:fontRef idx="minor">
-            <a:schemeClr val="lt1"/>
-          </a:fontRef>
-        </p:style>
-        <p:txBody>
-          <a:bodyPr rtlCol="0" anchor="ctr"/>
-          <a:lstStyle/>
-          <a:p>
-            <a:pPr algn="ctr"/>
-            <a:endParaRPr/>
-          </a:p>
-        </p:txBody>
-      </p:sp>
-      <p:sp>
-        <p:nvSpPr>
-          <p:cNvPr id="13" name="TextBox 12"/>
-          <p:cNvSpPr txBox="1"/>
-          <p:nvPr/>
-        </p:nvSpPr>
-        <p:spPr>
-          <a:xfrm>
-            <a:off x="2377439" y="4663440"/>
-            <a:ext cx="1737360" cy="731520"/>
-          </a:xfrm>
-          <a:prstGeom prst="rect">
-            <a:avLst/>
-          </a:prstGeom>
-          <a:noFill/>
-        </p:spPr>
-        <p:txBody>
-          <a:bodyPr wrap="square">
-            <a:spAutoFit/>
-          </a:bodyPr>
-          <a:lstStyle/>
-          <a:p>
-            <a:pPr algn="ctr"/>
-            <a:r>
-              <a:rPr sz="3000" b="1">
-                <a:solidFill>
-                  <a:srgbClr val="34D399"/>
-                </a:solidFill>
-              </a:rPr>
-              <a:t>/3</a:t>
-            </a:r>
-          </a:p>
-        </p:txBody>
-      </p:sp>
-      <p:sp>
-        <p:nvSpPr>
-          <p:cNvPr id="14" name="TextBox 13"/>
-          <p:cNvSpPr txBox="1"/>
-          <p:nvPr/>
-        </p:nvSpPr>
-        <p:spPr>
-          <a:xfrm>
-            <a:off x="2377439" y="5349240"/>
-            <a:ext cx="1737360" cy="320040"/>
-          </a:xfrm>
-          <a:prstGeom prst="rect">
-            <a:avLst/>
-          </a:prstGeom>
-          <a:noFill/>
-        </p:spPr>
-        <p:txBody>
-          <a:bodyPr wrap="square">
-            <a:spAutoFit/>
-          </a:bodyPr>
-          <a:lstStyle/>
-          <a:p>
-            <a:pPr algn="ctr"/>
-            <a:r>
-              <a:rPr sz="1200" b="0">
-                <a:solidFill>
-                  <a:srgbClr val="CBD5E1"/>
-                </a:solidFill>
-              </a:rPr>
-              <a:t>Pipeline</a:t>
-            </a:r>
-          </a:p>
-        </p:txBody>
-      </p:sp>
-      <p:sp>
-        <p:nvSpPr>
-          <p:cNvPr id="15" name="TextBox 14"/>
-          <p:cNvSpPr txBox="1"/>
-          <p:nvPr/>
-        </p:nvSpPr>
-        <p:spPr>
-          <a:xfrm>
-            <a:off x="2377439" y="5669280"/>
-            <a:ext cx="1737360" cy="320040"/>
-          </a:xfrm>
-          <a:prstGeom prst="rect">
-            <a:avLst/>
-          </a:prstGeom>
-          <a:noFill/>
-        </p:spPr>
-        <p:txBody>
-          <a:bodyPr wrap="square">
-            <a:spAutoFit/>
-          </a:bodyPr>
-          <a:lstStyle/>
-          <a:p>
-            <a:pPr algn="ctr"/>
-            <a:r>
-              <a:rPr sz="1200" b="0">
-                <a:solidFill>
-                  <a:srgbClr val="CBD5E1"/>
-                </a:solidFill>
-              </a:rPr>
-              <a:t>data</a:t>
-            </a:r>
-          </a:p>
-        </p:txBody>
-      </p:sp>
-      <p:sp>
-        <p:nvSpPr>
-          <p:cNvPr id="16" name="Rectangle 15"/>
-          <p:cNvSpPr/>
-          <p:nvPr/>
-        </p:nvSpPr>
-        <p:spPr>
-          <a:xfrm>
-            <a:off x="4251959" y="4617720"/>
-            <a:ext cx="1737360" cy="1554480"/>
-          </a:xfrm>
-          <a:prstGeom prst="rect">
-            <a:avLst/>
-          </a:prstGeom>
-          <a:solidFill>
-            <a:srgbClr val="1E293B"/>
-          </a:solidFill>
-          <a:ln>
-            <a:noFill/>
-          </a:ln>
-        </p:spPr>
-        <p:style>
-          <a:lnRef idx="1">
-            <a:schemeClr val="accent1"/>
-          </a:lnRef>
-          <a:fillRef idx="3">
-            <a:schemeClr val="accent1"/>
-          </a:fillRef>
-          <a:effectRef idx="2">
-            <a:schemeClr val="accent1"/>
-          </a:effectRef>
-          <a:fontRef idx="minor">
-            <a:schemeClr val="lt1"/>
-          </a:fontRef>
-        </p:style>
-        <p:txBody>
-          <a:bodyPr rtlCol="0" anchor="ctr"/>
-          <a:lstStyle/>
-          <a:p>
-            <a:pPr algn="ctr"/>
-            <a:endParaRPr/>
-          </a:p>
-        </p:txBody>
-      </p:sp>
-      <p:sp>
-        <p:nvSpPr>
-          <p:cNvPr id="17" name="TextBox 16"/>
-          <p:cNvSpPr txBox="1"/>
-          <p:nvPr/>
-        </p:nvSpPr>
-        <p:spPr>
-          <a:xfrm>
-            <a:off x="4251959" y="4663440"/>
-            <a:ext cx="1737360" cy="731520"/>
-          </a:xfrm>
-          <a:prstGeom prst="rect">
-            <a:avLst/>
-          </a:prstGeom>
-          <a:noFill/>
-        </p:spPr>
-        <p:txBody>
-          <a:bodyPr wrap="square">
-            <a:spAutoFit/>
-          </a:bodyPr>
-          <a:lstStyle/>
-          <a:p>
-            <a:pPr algn="ctr"/>
-            <a:r>
-              <a:rPr sz="3000" b="1">
-                <a:solidFill>
-                  <a:srgbClr val="FBBF24"/>
-                </a:solidFill>
-              </a:rPr>
-              <a:t>/4</a:t>
-            </a:r>
-          </a:p>
-        </p:txBody>
-      </p:sp>
-      <p:sp>
-        <p:nvSpPr>
-          <p:cNvPr id="18" name="TextBox 17"/>
-          <p:cNvSpPr txBox="1"/>
-          <p:nvPr/>
-        </p:nvSpPr>
-        <p:spPr>
-          <a:xfrm>
-            <a:off x="4251959" y="5349240"/>
-            <a:ext cx="1737360" cy="320040"/>
-          </a:xfrm>
-          <a:prstGeom prst="rect">
-            <a:avLst/>
-          </a:prstGeom>
-          <a:noFill/>
-        </p:spPr>
-        <p:txBody>
-          <a:bodyPr wrap="square">
-            <a:spAutoFit/>
-          </a:bodyPr>
-          <a:lstStyle/>
-          <a:p>
-            <a:pPr algn="ctr"/>
-            <a:r>
-              <a:rPr sz="1200" b="0">
-                <a:solidFill>
-                  <a:srgbClr val="CBD5E1"/>
-                </a:solidFill>
-              </a:rPr>
-              <a:t>Modele</a:t>
-            </a:r>
-          </a:p>
-        </p:txBody>
-      </p:sp>
-      <p:sp>
-        <p:nvSpPr>
-          <p:cNvPr id="19" name="TextBox 18"/>
-          <p:cNvSpPr txBox="1"/>
-          <p:nvPr/>
-        </p:nvSpPr>
-        <p:spPr>
-          <a:xfrm>
-            <a:off x="4251959" y="5669280"/>
-            <a:ext cx="1737360" cy="320040"/>
-          </a:xfrm>
-          <a:prstGeom prst="rect">
-            <a:avLst/>
-          </a:prstGeom>
-          <a:noFill/>
-        </p:spPr>
-        <p:txBody>
-          <a:bodyPr wrap="square">
-            <a:spAutoFit/>
-          </a:bodyPr>
-          <a:lstStyle/>
-          <a:p>
-            <a:pPr algn="ctr"/>
-            <a:r>
-              <a:rPr sz="1200" b="0">
-                <a:solidFill>
-                  <a:srgbClr val="CBD5E1"/>
-                </a:solidFill>
-              </a:rPr>
-              <a:t>ML</a:t>
-            </a:r>
-          </a:p>
-        </p:txBody>
-      </p:sp>
-      <p:sp>
-        <p:nvSpPr>
-          <p:cNvPr id="20" name="Rectangle 19"/>
-          <p:cNvSpPr/>
-          <p:nvPr/>
-        </p:nvSpPr>
-        <p:spPr>
-          <a:xfrm>
-            <a:off x="6126479" y="4617720"/>
-            <a:ext cx="1737360" cy="1554480"/>
-          </a:xfrm>
-          <a:prstGeom prst="rect">
-            <a:avLst/>
-          </a:prstGeom>
-          <a:solidFill>
-            <a:srgbClr val="1E293B"/>
-          </a:solidFill>
-          <a:ln>
-            <a:noFill/>
-          </a:ln>
-        </p:spPr>
-        <p:style>
-          <a:lnRef idx="1">
-            <a:schemeClr val="accent1"/>
-          </a:lnRef>
-          <a:fillRef idx="3">
-            <a:schemeClr val="accent1"/>
-          </a:fillRef>
-          <a:effectRef idx="2">
-            <a:schemeClr val="accent1"/>
-          </a:effectRef>
-          <a:fontRef idx="minor">
-            <a:schemeClr val="lt1"/>
-          </a:fontRef>
-        </p:style>
-        <p:txBody>
-          <a:bodyPr rtlCol="0" anchor="ctr"/>
-          <a:lstStyle/>
-          <a:p>
-            <a:pPr algn="ctr"/>
-            <a:endParaRPr/>
-          </a:p>
-        </p:txBody>
-      </p:sp>
-      <p:sp>
-        <p:nvSpPr>
-          <p:cNvPr id="21" name="TextBox 20"/>
-          <p:cNvSpPr txBox="1"/>
-          <p:nvPr/>
-        </p:nvSpPr>
-        <p:spPr>
-          <a:xfrm>
-            <a:off x="6126479" y="4663440"/>
-            <a:ext cx="1737360" cy="731520"/>
-          </a:xfrm>
-          <a:prstGeom prst="rect">
-            <a:avLst/>
-          </a:prstGeom>
-          <a:noFill/>
-        </p:spPr>
-        <p:txBody>
-          <a:bodyPr wrap="square">
-            <a:spAutoFit/>
-          </a:bodyPr>
-          <a:lstStyle/>
-          <a:p>
-            <a:pPr algn="ctr"/>
-            <a:r>
-              <a:rPr sz="3000" b="1">
-                <a:solidFill>
-                  <a:srgbClr val="F47FFF"/>
-                </a:solidFill>
-              </a:rPr>
-              <a:t>/5</a:t>
-            </a:r>
-          </a:p>
-        </p:txBody>
-      </p:sp>
-      <p:sp>
-        <p:nvSpPr>
-          <p:cNvPr id="22" name="TextBox 21"/>
-          <p:cNvSpPr txBox="1"/>
-          <p:nvPr/>
-        </p:nvSpPr>
-        <p:spPr>
-          <a:xfrm>
-            <a:off x="6126479" y="5349240"/>
-            <a:ext cx="1737360" cy="320040"/>
-          </a:xfrm>
-          <a:prstGeom prst="rect">
-            <a:avLst/>
-          </a:prstGeom>
-          <a:noFill/>
-        </p:spPr>
-        <p:txBody>
-          <a:bodyPr wrap="square">
-            <a:spAutoFit/>
-          </a:bodyPr>
-          <a:lstStyle/>
-          <a:p>
-            <a:pPr algn="ctr"/>
-            <a:r>
-              <a:rPr sz="1200" b="0">
-                <a:solidFill>
-                  <a:srgbClr val="CBD5E1"/>
-                </a:solidFill>
-              </a:rPr>
-              <a:t>App +</a:t>
-            </a:r>
-          </a:p>
-        </p:txBody>
-      </p:sp>
-      <p:sp>
-        <p:nvSpPr>
-          <p:cNvPr id="23" name="TextBox 22"/>
-          <p:cNvSpPr txBox="1"/>
-          <p:nvPr/>
-        </p:nvSpPr>
-        <p:spPr>
-          <a:xfrm>
-            <a:off x="6126479" y="5669280"/>
-            <a:ext cx="1737360" cy="320040"/>
-          </a:xfrm>
-          <a:prstGeom prst="rect">
-            <a:avLst/>
-          </a:prstGeom>
-          <a:noFill/>
-        </p:spPr>
-        <p:txBody>
-          <a:bodyPr wrap="square">
-            <a:spAutoFit/>
-          </a:bodyPr>
-          <a:lstStyle/>
-          <a:p>
-            <a:pPr algn="ctr"/>
-            <a:r>
-              <a:rPr sz="1200" b="0">
-                <a:solidFill>
-                  <a:srgbClr val="CBD5E1"/>
-                </a:solidFill>
-              </a:rPr>
-              <a:t>Deploy</a:t>
-            </a:r>
-          </a:p>
-        </p:txBody>
-      </p:sp>
-      <p:sp>
-        <p:nvSpPr>
-          <p:cNvPr id="24" name="Rectangle 23"/>
-          <p:cNvSpPr/>
-          <p:nvPr/>
-        </p:nvSpPr>
-        <p:spPr>
-          <a:xfrm>
-            <a:off x="8001000" y="4617720"/>
-            <a:ext cx="1737360" cy="1554480"/>
-          </a:xfrm>
-          <a:prstGeom prst="rect">
-            <a:avLst/>
-          </a:prstGeom>
-          <a:solidFill>
-            <a:srgbClr val="1E293B"/>
-          </a:solidFill>
-          <a:ln>
-            <a:noFill/>
-          </a:ln>
-        </p:spPr>
-        <p:style>
-          <a:lnRef idx="1">
-            <a:schemeClr val="accent1"/>
-          </a:lnRef>
-          <a:fillRef idx="3">
-            <a:schemeClr val="accent1"/>
-          </a:fillRef>
-          <a:effectRef idx="2">
-            <a:schemeClr val="accent1"/>
-          </a:effectRef>
-          <a:fontRef idx="minor">
-            <a:schemeClr val="lt1"/>
-          </a:fontRef>
-        </p:style>
-        <p:txBody>
-          <a:bodyPr rtlCol="0" anchor="ctr"/>
-          <a:lstStyle/>
-          <a:p>
-            <a:pPr algn="ctr"/>
-            <a:endParaRPr/>
-          </a:p>
-        </p:txBody>
-      </p:sp>
-      <p:sp>
-        <p:nvSpPr>
-          <p:cNvPr id="25" name="TextBox 24"/>
-          <p:cNvSpPr txBox="1"/>
-          <p:nvPr/>
-        </p:nvSpPr>
-        <p:spPr>
-          <a:xfrm>
-            <a:off x="8001000" y="4663440"/>
-            <a:ext cx="1737360" cy="731520"/>
-          </a:xfrm>
-          <a:prstGeom prst="rect">
-            <a:avLst/>
-          </a:prstGeom>
-          <a:noFill/>
-        </p:spPr>
-        <p:txBody>
-          <a:bodyPr wrap="square">
-            <a:spAutoFit/>
-          </a:bodyPr>
-          <a:lstStyle/>
-          <a:p>
-            <a:pPr algn="ctr"/>
-            <a:r>
-              <a:rPr sz="3000" b="1">
-                <a:solidFill>
-                  <a:srgbClr val="CBD5E1"/>
-                </a:solidFill>
-              </a:rPr>
-              <a:t>/5</a:t>
-            </a:r>
-          </a:p>
-        </p:txBody>
-      </p:sp>
-      <p:sp>
-        <p:nvSpPr>
-          <p:cNvPr id="26" name="TextBox 25"/>
-          <p:cNvSpPr txBox="1"/>
-          <p:nvPr/>
-        </p:nvSpPr>
-        <p:spPr>
-          <a:xfrm>
-            <a:off x="8001000" y="5349240"/>
-            <a:ext cx="1737360" cy="320040"/>
-          </a:xfrm>
-          <a:prstGeom prst="rect">
-            <a:avLst/>
-          </a:prstGeom>
-          <a:noFill/>
-        </p:spPr>
-        <p:txBody>
-          <a:bodyPr wrap="square">
-            <a:spAutoFit/>
-          </a:bodyPr>
-          <a:lstStyle/>
-          <a:p>
-            <a:pPr algn="ctr"/>
-            <a:r>
-              <a:rPr sz="1200" b="0">
-                <a:solidFill>
-                  <a:srgbClr val="CBD5E1"/>
-                </a:solidFill>
-              </a:rPr>
-              <a:t>Oral</a:t>
-            </a:r>
-          </a:p>
-        </p:txBody>
-      </p:sp>
-      <p:sp>
-        <p:nvSpPr>
-          <p:cNvPr id="27" name="Rectangle 26"/>
-          <p:cNvSpPr/>
-          <p:nvPr/>
-        </p:nvSpPr>
-        <p:spPr>
-          <a:xfrm>
-            <a:off x="9875520" y="4617720"/>
-            <a:ext cx="1737360" cy="1554480"/>
-          </a:xfrm>
-          <a:prstGeom prst="rect">
-            <a:avLst/>
-          </a:prstGeom>
-          <a:solidFill>
-            <a:srgbClr val="38BDF8"/>
-          </a:solidFill>
-          <a:ln>
-            <a:noFill/>
-          </a:ln>
-        </p:spPr>
-        <p:style>
-          <a:lnRef idx="1">
-            <a:schemeClr val="accent1"/>
-          </a:lnRef>
-          <a:fillRef idx="3">
-            <a:schemeClr val="accent1"/>
-          </a:fillRef>
-          <a:effectRef idx="2">
-            <a:schemeClr val="accent1"/>
-          </a:effectRef>
-          <a:fontRef idx="minor">
-            <a:schemeClr val="lt1"/>
-          </a:fontRef>
-        </p:style>
-        <p:txBody>
-          <a:bodyPr rtlCol="0" anchor="ctr"/>
-          <a:lstStyle/>
-          <a:p>
-            <a:pPr algn="ctr"/>
-            <a:endParaRPr/>
-          </a:p>
-        </p:txBody>
-      </p:sp>
-      <p:sp>
-        <p:nvSpPr>
-          <p:cNvPr id="28" name="TextBox 27"/>
-          <p:cNvSpPr txBox="1"/>
-          <p:nvPr/>
-        </p:nvSpPr>
-        <p:spPr>
-          <a:xfrm>
-            <a:off x="9875520" y="4663440"/>
-            <a:ext cx="1737360" cy="731520"/>
-          </a:xfrm>
-          <a:prstGeom prst="rect">
-            <a:avLst/>
-          </a:prstGeom>
-          <a:noFill/>
-        </p:spPr>
-        <p:txBody>
-          <a:bodyPr wrap="square">
-            <a:spAutoFit/>
-          </a:bodyPr>
-          <a:lstStyle/>
-          <a:p>
-            <a:pPr algn="ctr"/>
-            <a:r>
-              <a:rPr sz="3000" b="1">
-                <a:solidFill>
-                  <a:srgbClr val="FBBF24"/>
-                </a:solidFill>
-              </a:rPr>
-              <a:t>/20</a:t>
-            </a:r>
-          </a:p>
-        </p:txBody>
-      </p:sp>
-      <p:sp>
-        <p:nvSpPr>
-          <p:cNvPr id="29" name="TextBox 28"/>
-          <p:cNvSpPr txBox="1"/>
-          <p:nvPr/>
-        </p:nvSpPr>
-        <p:spPr>
-          <a:xfrm>
-            <a:off x="9875520" y="5349240"/>
-            <a:ext cx="1737360" cy="320040"/>
-          </a:xfrm>
-          <a:prstGeom prst="rect">
-            <a:avLst/>
-          </a:prstGeom>
-          <a:noFill/>
-        </p:spPr>
-        <p:txBody>
-          <a:bodyPr wrap="square">
-            <a:spAutoFit/>
-          </a:bodyPr>
-          <a:lstStyle/>
-          <a:p>
-            <a:pPr algn="ctr"/>
-            <a:r>
-              <a:rPr sz="1200" b="0">
-                <a:solidFill>
-                  <a:srgbClr val="CBD5E1"/>
-                </a:solidFill>
-              </a:rPr>
-              <a:t>TOTAL</a:t>
-            </a:r>
           </a:p>
         </p:txBody>
       </p:sp>
@@ -9948,4 +10056,319 @@
   </a:objectDefaults>
   <a:extraClrSchemeLst/>
 </a:theme>
+</file>
+
+<file path=ppt/theme/theme2.xml><?xml version="1.0" encoding="utf-8"?>
+<a:theme xmlns:a="http://schemas.openxmlformats.org/drawingml/2006/main" name="Thème Office">
+  <a:themeElements>
+    <a:clrScheme name="Office">
+      <a:dk1>
+        <a:sysClr val="windowText" lastClr="000000"/>
+      </a:dk1>
+      <a:lt1>
+        <a:sysClr val="window" lastClr="FFFFFF"/>
+      </a:lt1>
+      <a:dk2>
+        <a:srgbClr val="0E2841"/>
+      </a:dk2>
+      <a:lt2>
+        <a:srgbClr val="E8E8E8"/>
+      </a:lt2>
+      <a:accent1>
+        <a:srgbClr val="156082"/>
+      </a:accent1>
+      <a:accent2>
+        <a:srgbClr val="E97132"/>
+      </a:accent2>
+      <a:accent3>
+        <a:srgbClr val="196B24"/>
+      </a:accent3>
+      <a:accent4>
+        <a:srgbClr val="0F9ED5"/>
+      </a:accent4>
+      <a:accent5>
+        <a:srgbClr val="A02B93"/>
+      </a:accent5>
+      <a:accent6>
+        <a:srgbClr val="4EA72E"/>
+      </a:accent6>
+      <a:hlink>
+        <a:srgbClr val="467886"/>
+      </a:hlink>
+      <a:folHlink>
+        <a:srgbClr val="96607D"/>
+      </a:folHlink>
+    </a:clrScheme>
+    <a:fontScheme name="Office">
+      <a:majorFont>
+        <a:latin typeface="Aptos Display" panose="02110004020202020204"/>
+        <a:ea typeface=""/>
+        <a:cs typeface=""/>
+        <a:font script="Jpan" typeface="游ゴシック Light"/>
+        <a:font script="Hang" typeface="맑은 고딕"/>
+        <a:font script="Hans" typeface="等线 Light"/>
+        <a:font script="Hant" typeface="新細明體"/>
+        <a:font script="Arab" typeface="Times New Roman"/>
+        <a:font script="Hebr" typeface="Times New Roman"/>
+        <a:font script="Thai" typeface="Angsana New"/>
+        <a:font script="Ethi" typeface="Nyala"/>
+        <a:font script="Beng" typeface="Vrinda"/>
+        <a:font script="Gujr" typeface="Shruti"/>
+        <a:font script="Khmr" typeface="MoolBoran"/>
+        <a:font script="Knda" typeface="Tunga"/>
+        <a:font script="Guru" typeface="Raavi"/>
+        <a:font script="Cans" typeface="Euphemia"/>
+        <a:font script="Cher" typeface="Plantagenet Cherokee"/>
+        <a:font script="Yiii" typeface="Microsoft Yi Baiti"/>
+        <a:font script="Tibt" typeface="Microsoft Himalaya"/>
+        <a:font script="Thaa" typeface="MV Boli"/>
+        <a:font script="Deva" typeface="Mangal"/>
+        <a:font script="Telu" typeface="Gautami"/>
+        <a:font script="Taml" typeface="Latha"/>
+        <a:font script="Syrc" typeface="Estrangelo Edessa"/>
+        <a:font script="Orya" typeface="Kalinga"/>
+        <a:font script="Mlym" typeface="Kartika"/>
+        <a:font script="Laoo" typeface="DokChampa"/>
+        <a:font script="Sinh" typeface="Iskoola Pota"/>
+        <a:font script="Mong" typeface="Mongolian Baiti"/>
+        <a:font script="Viet" typeface="Times New Roman"/>
+        <a:font script="Uigh" typeface="Microsoft Uighur"/>
+        <a:font script="Geor" typeface="Sylfaen"/>
+        <a:font script="Armn" typeface="Arial"/>
+        <a:font script="Bugi" typeface="Leelawadee UI"/>
+        <a:font script="Bopo" typeface="Microsoft JhengHei"/>
+        <a:font script="Java" typeface="Javanese Text"/>
+        <a:font script="Lisu" typeface="Segoe UI"/>
+        <a:font script="Mymr" typeface="Myanmar Text"/>
+        <a:font script="Nkoo" typeface="Ebrima"/>
+        <a:font script="Olck" typeface="Nirmala UI"/>
+        <a:font script="Osma" typeface="Ebrima"/>
+        <a:font script="Phag" typeface="Phagspa"/>
+        <a:font script="Syrn" typeface="Estrangelo Edessa"/>
+        <a:font script="Syrj" typeface="Estrangelo Edessa"/>
+        <a:font script="Syre" typeface="Estrangelo Edessa"/>
+        <a:font script="Sora" typeface="Nirmala UI"/>
+        <a:font script="Tale" typeface="Microsoft Tai Le"/>
+        <a:font script="Talu" typeface="Microsoft New Tai Lue"/>
+        <a:font script="Tfng" typeface="Ebrima"/>
+      </a:majorFont>
+      <a:minorFont>
+        <a:latin typeface="Aptos" panose="02110004020202020204"/>
+        <a:ea typeface=""/>
+        <a:cs typeface=""/>
+        <a:font script="Jpan" typeface="游ゴシック"/>
+        <a:font script="Hang" typeface="맑은 고딕"/>
+        <a:font script="Hans" typeface="等线"/>
+        <a:font script="Hant" typeface="新細明體"/>
+        <a:font script="Arab" typeface="Arial"/>
+        <a:font script="Hebr" typeface="Arial"/>
+        <a:font script="Thai" typeface="Cordia New"/>
+        <a:font script="Ethi" typeface="Nyala"/>
+        <a:font script="Beng" typeface="Vrinda"/>
+        <a:font script="Gujr" typeface="Shruti"/>
+        <a:font script="Khmr" typeface="DaunPenh"/>
+        <a:font script="Knda" typeface="Tunga"/>
+        <a:font script="Guru" typeface="Raavi"/>
+        <a:font script="Cans" typeface="Euphemia"/>
+        <a:font script="Cher" typeface="Plantagenet Cherokee"/>
+        <a:font script="Yiii" typeface="Microsoft Yi Baiti"/>
+        <a:font script="Tibt" typeface="Microsoft Himalaya"/>
+        <a:font script="Thaa" typeface="MV Boli"/>
+        <a:font script="Deva" typeface="Mangal"/>
+        <a:font script="Telu" typeface="Gautami"/>
+        <a:font script="Taml" typeface="Latha"/>
+        <a:font script="Syrc" typeface="Estrangelo Edessa"/>
+        <a:font script="Orya" typeface="Kalinga"/>
+        <a:font script="Mlym" typeface="Kartika"/>
+        <a:font script="Laoo" typeface="DokChampa"/>
+        <a:font script="Sinh" typeface="Iskoola Pota"/>
+        <a:font script="Mong" typeface="Mongolian Baiti"/>
+        <a:font script="Viet" typeface="Arial"/>
+        <a:font script="Uigh" typeface="Microsoft Uighur"/>
+        <a:font script="Geor" typeface="Sylfaen"/>
+        <a:font script="Armn" typeface="Arial"/>
+        <a:font script="Bugi" typeface="Leelawadee UI"/>
+        <a:font script="Bopo" typeface="Microsoft JhengHei"/>
+        <a:font script="Java" typeface="Javanese Text"/>
+        <a:font script="Lisu" typeface="Segoe UI"/>
+        <a:font script="Mymr" typeface="Myanmar Text"/>
+        <a:font script="Nkoo" typeface="Ebrima"/>
+        <a:font script="Olck" typeface="Nirmala UI"/>
+        <a:font script="Osma" typeface="Ebrima"/>
+        <a:font script="Phag" typeface="Phagspa"/>
+        <a:font script="Syrn" typeface="Estrangelo Edessa"/>
+        <a:font script="Syrj" typeface="Estrangelo Edessa"/>
+        <a:font script="Syre" typeface="Estrangelo Edessa"/>
+        <a:font script="Sora" typeface="Nirmala UI"/>
+        <a:font script="Tale" typeface="Microsoft Tai Le"/>
+        <a:font script="Talu" typeface="Microsoft New Tai Lue"/>
+        <a:font script="Tfng" typeface="Ebrima"/>
+      </a:minorFont>
+    </a:fontScheme>
+    <a:fmtScheme name="Office">
+      <a:fillStyleLst>
+        <a:solidFill>
+          <a:schemeClr val="phClr"/>
+        </a:solidFill>
+        <a:gradFill rotWithShape="1">
+          <a:gsLst>
+            <a:gs pos="0">
+              <a:schemeClr val="phClr">
+                <a:lumMod val="110000"/>
+                <a:satMod val="105000"/>
+                <a:tint val="67000"/>
+              </a:schemeClr>
+            </a:gs>
+            <a:gs pos="50000">
+              <a:schemeClr val="phClr">
+                <a:lumMod val="105000"/>
+                <a:satMod val="103000"/>
+                <a:tint val="73000"/>
+              </a:schemeClr>
+            </a:gs>
+            <a:gs pos="100000">
+              <a:schemeClr val="phClr">
+                <a:lumMod val="105000"/>
+                <a:satMod val="109000"/>
+                <a:tint val="81000"/>
+              </a:schemeClr>
+            </a:gs>
+          </a:gsLst>
+          <a:lin ang="5400000" scaled="0"/>
+        </a:gradFill>
+        <a:gradFill rotWithShape="1">
+          <a:gsLst>
+            <a:gs pos="0">
+              <a:schemeClr val="phClr">
+                <a:satMod val="103000"/>
+                <a:lumMod val="102000"/>
+                <a:tint val="94000"/>
+              </a:schemeClr>
+            </a:gs>
+            <a:gs pos="50000">
+              <a:schemeClr val="phClr">
+                <a:satMod val="110000"/>
+                <a:lumMod val="100000"/>
+                <a:shade val="100000"/>
+              </a:schemeClr>
+            </a:gs>
+            <a:gs pos="100000">
+              <a:schemeClr val="phClr">
+                <a:lumMod val="99000"/>
+                <a:satMod val="120000"/>
+                <a:shade val="78000"/>
+              </a:schemeClr>
+            </a:gs>
+          </a:gsLst>
+          <a:lin ang="5400000" scaled="0"/>
+        </a:gradFill>
+      </a:fillStyleLst>
+      <a:lnStyleLst>
+        <a:ln w="12700" cap="flat" cmpd="sng" algn="ctr">
+          <a:solidFill>
+            <a:schemeClr val="phClr"/>
+          </a:solidFill>
+          <a:prstDash val="solid"/>
+          <a:miter lim="800000"/>
+        </a:ln>
+        <a:ln w="19050" cap="flat" cmpd="sng" algn="ctr">
+          <a:solidFill>
+            <a:schemeClr val="phClr"/>
+          </a:solidFill>
+          <a:prstDash val="solid"/>
+          <a:miter lim="800000"/>
+        </a:ln>
+        <a:ln w="25400" cap="flat" cmpd="sng" algn="ctr">
+          <a:solidFill>
+            <a:schemeClr val="phClr"/>
+          </a:solidFill>
+          <a:prstDash val="solid"/>
+          <a:miter lim="800000"/>
+        </a:ln>
+      </a:lnStyleLst>
+      <a:effectStyleLst>
+        <a:effectStyle>
+          <a:effectLst/>
+        </a:effectStyle>
+        <a:effectStyle>
+          <a:effectLst/>
+        </a:effectStyle>
+        <a:effectStyle>
+          <a:effectLst>
+            <a:outerShdw blurRad="57150" dist="19050" dir="5400000" algn="ctr" rotWithShape="0">
+              <a:srgbClr val="000000">
+                <a:alpha val="63000"/>
+              </a:srgbClr>
+            </a:outerShdw>
+          </a:effectLst>
+        </a:effectStyle>
+      </a:effectStyleLst>
+      <a:bgFillStyleLst>
+        <a:solidFill>
+          <a:schemeClr val="phClr"/>
+        </a:solidFill>
+        <a:solidFill>
+          <a:schemeClr val="phClr">
+            <a:tint val="95000"/>
+            <a:satMod val="170000"/>
+          </a:schemeClr>
+        </a:solidFill>
+        <a:gradFill rotWithShape="1">
+          <a:gsLst>
+            <a:gs pos="0">
+              <a:schemeClr val="phClr">
+                <a:tint val="93000"/>
+                <a:satMod val="150000"/>
+                <a:shade val="98000"/>
+                <a:lumMod val="102000"/>
+              </a:schemeClr>
+            </a:gs>
+            <a:gs pos="50000">
+              <a:schemeClr val="phClr">
+                <a:tint val="98000"/>
+                <a:satMod val="130000"/>
+                <a:shade val="90000"/>
+                <a:lumMod val="103000"/>
+              </a:schemeClr>
+            </a:gs>
+            <a:gs pos="100000">
+              <a:schemeClr val="phClr">
+                <a:shade val="63000"/>
+                <a:satMod val="120000"/>
+              </a:schemeClr>
+            </a:gs>
+          </a:gsLst>
+          <a:lin ang="5400000" scaled="0"/>
+        </a:gradFill>
+      </a:bgFillStyleLst>
+    </a:fmtScheme>
+  </a:themeElements>
+  <a:objectDefaults>
+    <a:lnDef>
+      <a:spPr/>
+      <a:bodyPr/>
+      <a:lstStyle/>
+      <a:style>
+        <a:lnRef idx="2">
+          <a:schemeClr val="accent1"/>
+        </a:lnRef>
+        <a:fillRef idx="0">
+          <a:schemeClr val="accent1"/>
+        </a:fillRef>
+        <a:effectRef idx="1">
+          <a:schemeClr val="accent1"/>
+        </a:effectRef>
+        <a:fontRef idx="minor">
+          <a:schemeClr val="tx1"/>
+        </a:fontRef>
+      </a:style>
+    </a:lnDef>
+  </a:objectDefaults>
+  <a:extraClrSchemeLst/>
+  <a:extLst>
+    <a:ext uri="{05A4C25C-085E-4340-85A3-A5531E510DB2}">
+      <thm15:themeFamily xmlns:thm15="http://schemas.microsoft.com/office/thememl/2012/main" name="Office Theme" id="{2E142A2C-CD16-42D6-873A-C26D2A0506FA}" vid="{1BDDFF52-6CD6-40A5-AB3C-68EB2F1E4D0A}"/>
+    </a:ext>
+  </a:extLst>
+</a:theme>
 </file>